--- a/it/slides/10-Architettura_dei_Calcolatori-Elettronica.pptx
+++ b/it/slides/10-Architettura_dei_Calcolatori-Elettronica.pptx
@@ -126,13 +126,13 @@
   <p:extLst>
     <p:ext uri="{521415D9-36F7-43E2-AB2F-B90AF26B5E84}">
       <p14:sectionLst xmlns:p14="http://schemas.microsoft.com/office/powerpoint/2010/main">
-        <p14:section name="Apertura" id="{1fe898e0-14e7-78df-a09c-df3ad05ea666}">
+        <p14:section name="Apertura" id="{3405081f-a19b-52c5-bb5f-6f01dbcd5129}">
           <p14:sldIdLst>
             <p14:sldId id="256"/>
             <p14:sldId id="257"/>
           </p14:sldIdLst>
         </p14:section>
-        <p14:section name="L'elettricità in quattro grandezze" id="{14bd2c6d-0a45-3203-2c6a-198c9f561928}">
+        <p14:section name="L'elettricità in quattro grandezze" id="{2d7d6d17-1b3c-9a7a-01d2-cc3c85beef23}">
           <p14:sldIdLst>
             <p14:sldId id="258"/>
             <p14:sldId id="259"/>
@@ -140,14 +140,14 @@
             <p14:sldId id="261"/>
           </p14:sldIdLst>
         </p14:section>
-        <p14:section name="Semiconduttori" id="{ad3b4c46-31eb-2a2f-ff60-f038d185a4b6}">
+        <p14:section name="Semiconduttori" id="{5a97e6b7-e1fb-d75f-435f-445bb880d1de}">
           <p14:sldIdLst>
             <p14:sldId id="262"/>
             <p14:sldId id="263"/>
             <p14:sldId id="264"/>
           </p14:sldIdLst>
         </p14:section>
-        <p14:section name="Dai volt ai bit" id="{3459f20a-d2fb-de1e-9853-255ed4c3b9f9}">
+        <p14:section name="Dai volt ai bit" id="{665db414-ab4e-0503-9750-2085a2b8e95b}">
           <p14:sldIdLst>
             <p14:sldId id="265"/>
             <p14:sldId id="266"/>
@@ -157,7 +157,7 @@
             <p14:sldId id="270"/>
           </p14:sldIdLst>
         </p14:section>
-        <p14:section name="Ritorno alla macchina" id="{42e12e06-7078-be47-237c-cf3a36ccf60f}">
+        <p14:section name="Ritorno alla macchina" id="{77b61ab4-f9de-7f9d-a092-e4a0cd7dba95}">
           <p14:sldIdLst>
             <p14:sldId id="271"/>
             <p14:sldId id="272"/>
@@ -3294,7 +3294,63 @@
       </p:sp>
       <p:sp>
         <p:nvSpPr>
-          <p:cNvPr id="12" name="Shape 10"/>
+          <p:cNvPr id="12" name="Text 10"/>
+          <p:cNvSpPr txBox="1"/>
+          <p:nvPr/>
+        </p:nvSpPr>
+        <p:spPr>
+          <a:xfrm>
+            <a:off x="4693615" y="566928"/>
+            <a:ext cx="6949440" cy="640080"/>
+          </a:xfrm>
+          <a:prstGeom prst="rect">
+            <a:avLst/>
+          </a:prstGeom>
+          <a:noFill/>
+          <a:ln/>
+        </p:spPr>
+        <p:txBody>
+          <a:bodyPr wrap="square" lIns="0" tIns="0" rIns="0" bIns="0" rtlCol="0" anchor="t"/>
+          <a:lstStyle/>
+          <a:p>
+            <a:pPr algn="r" indent="0" marL="0">
+              <a:buNone/>
+            </a:pPr>
+            <a:r>
+              <a:rPr lang="en-US" sz="1300" dirty="0">
+                <a:solidFill>
+                  <a:srgbClr val="CFE3EA"/>
+                </a:solidFill>
+                <a:latin typeface="Calibri" pitchFamily="34" charset="0"/>
+                <a:ea typeface="Calibri" pitchFamily="34" charset="-122"/>
+                <a:cs typeface="Calibri" pitchFamily="34" charset="-120"/>
+              </a:rPr>
+              <a:t>Presentazione della lezione. I listati, il programma completo e come provarlo sono nella presentazione del codice:</a:t>
+            </a:r>
+            <a:endParaRPr lang="en-US" sz="1300" dirty="0"/>
+          </a:p>
+          <a:p>
+            <a:pPr algn="r" indent="0" marL="0">
+              <a:buNone/>
+            </a:pPr>
+            <a:r>
+              <a:rPr lang="en-US" sz="1300" dirty="0">
+                <a:solidFill>
+                  <a:srgbClr val="CFE3EA"/>
+                </a:solidFill>
+                <a:latin typeface="Calibri" pitchFamily="34" charset="0"/>
+                <a:ea typeface="Calibri" pitchFamily="34" charset="-122"/>
+                <a:cs typeface="Calibri" pitchFamily="34" charset="-120"/>
+              </a:rPr>
+              <a:t>10-Architettura_dei_Calcolatori-Elettronica-Codice.pptx</a:t>
+            </a:r>
+            <a:endParaRPr lang="en-US" sz="1300" dirty="0"/>
+          </a:p>
+        </p:txBody>
+      </p:sp>
+      <p:sp>
+        <p:nvSpPr>
+          <p:cNvPr id="13" name="Shape 11"/>
           <p:cNvSpPr/>
           <p:nvPr/>
         </p:nvSpPr>
@@ -3321,7 +3377,7 @@
       </p:sp>
       <p:pic>
         <p:nvPicPr>
-          <p:cNvPr id="13" name="Image 0" descr="/Users/raffaelemontella/devel/riscv-prg32/computer-architecture-with-prg32/tools/assets/kit_breadboard.png">    </p:cNvPr>
+          <p:cNvPr id="14" name="Image 0" descr="/Users/raffaelemontella/devel/riscv-prg32/computer-architecture-with-prg32/tools/assets/kit_breadboard.png">    </p:cNvPr>
           <p:cNvPicPr>
             <a:picLocks noChangeAspect="1"/>
           </p:cNvPicPr>

--- a/it/slides/10-Architettura_dei_Calcolatori-Elettronica.pptx
+++ b/it/slides/10-Architettura_dei_Calcolatori-Elettronica.pptx
@@ -126,13 +126,13 @@
   <p:extLst>
     <p:ext uri="{521415D9-36F7-43E2-AB2F-B90AF26B5E84}">
       <p14:sectionLst xmlns:p14="http://schemas.microsoft.com/office/powerpoint/2010/main">
-        <p14:section name="Apertura" id="{3405081f-a19b-52c5-bb5f-6f01dbcd5129}">
+        <p14:section name="Apertura" id="{e332e784-68b6-144b-9f97-f1afbb5aac0e}">
           <p14:sldIdLst>
             <p14:sldId id="256"/>
             <p14:sldId id="257"/>
           </p14:sldIdLst>
         </p14:section>
-        <p14:section name="L'elettricità in quattro grandezze" id="{2d7d6d17-1b3c-9a7a-01d2-cc3c85beef23}">
+        <p14:section name="L'elettricità in quattro grandezze" id="{0dae2bde-9e0f-9c59-b653-2a7365512a0e}">
           <p14:sldIdLst>
             <p14:sldId id="258"/>
             <p14:sldId id="259"/>
@@ -140,14 +140,14 @@
             <p14:sldId id="261"/>
           </p14:sldIdLst>
         </p14:section>
-        <p14:section name="Semiconduttori" id="{5a97e6b7-e1fb-d75f-435f-445bb880d1de}">
+        <p14:section name="Semiconduttori" id="{d2389c38-c999-b833-66d8-9ae0bd9414d5}">
           <p14:sldIdLst>
             <p14:sldId id="262"/>
             <p14:sldId id="263"/>
             <p14:sldId id="264"/>
           </p14:sldIdLst>
         </p14:section>
-        <p14:section name="Dai volt ai bit" id="{665db414-ab4e-0503-9750-2085a2b8e95b}">
+        <p14:section name="Dai volt ai bit" id="{ee9b945c-dd19-8afc-035e-3efe88d724aa}">
           <p14:sldIdLst>
             <p14:sldId id="265"/>
             <p14:sldId id="266"/>
@@ -157,7 +157,7 @@
             <p14:sldId id="270"/>
           </p14:sldIdLst>
         </p14:section>
-        <p14:section name="Ritorno alla macchina" id="{77b61ab4-f9de-7f9d-a092-e4a0cd7dba95}">
+        <p14:section name="Ritorno alla macchina" id="{3bbc0806-e78f-f5c3-e0c3-4aafc0cc4c1c}">
           <p14:sldIdLst>
             <p14:sldId id="271"/>
             <p14:sldId id="272"/>
@@ -571,6 +571,8 @@
             <a:r>
               <a:rPr lang="en-US" dirty="0"/>
               <a:t>Finora una porta è stata un simbolo e una tabella di verità. Questa lezione le dà un corpo. Segue un bit, quello di un pulsante del kit, dal dito che lo preme al registro che il vostro programma legge, e strada facendo spiega che cos'è un volt, che cosa fa un transistor, e come due transistor fanno un NOT. Non si presuppongono conoscenze di fisica. La citazione di Clarke è la sensazione da dissipare: un chip sembra magia solo finché non si vede di che cosa è fatto.
+Stato di apprendimento: DA COMPRENDERE OGGI, alla fine di questa lezione lo spiegate, lo seguite passo passo e lo applicate da soli; DA UTILIZZARE OGGI, oggi seguite e usate la ricetta; come funziona dentro si spiega più avanti, o non fa parte del corso; DA COMPRENDERE PIÙ AVANTI, riconoscete il nome e lo scopo; lo spiega una lezione successiva. Una slide senza etichetta è contesto: una storia, un esempio, una domanda, un esercizio.
+Stato di apprendimento di questa lezione. DA COMPRENDERE OGGI: gli ingressi con pull-up; tensione, corrente, legge di Ohm; il transistor come interruttore; dai volt ai bit; le porte CMOS. DA UTILIZZARE OGGI: il programma completo, gli strumenti di PRG32 (si usa, non si studia, in questo corso). DA COMPRENDERE PIÙ AVANTI: il clock (Lezione 13). Una slide senza etichetta è contesto: una storia, un esempio, una domanda, un esercizio.
 Per il docente: Lezione nuova del 2026/27, collocata tra l'algebra di Boole e le macchine combinatorie. Dà un corpo fisico alle porte delle Lezioni 08 e 09 prima che la Lezione 11 le componga in macchine. Spirale: il pulsante del kit, letto fin dai primi laboratori, viene seguito dal dito al bit. Non si presuppongono conoscenze di fisica; i numeri del kit vengono dal datasheet dell'ESP32-C6 (tabella 5-4) e dalla documentazione hardware di PRG32.</a:t>
             </a:r>
             <a:endParaRPr lang="en-US" dirty="0"/>
@@ -660,6 +662,7 @@
             <a:r>
               <a:rPr lang="en-US" dirty="0"/>
               <a:t>Un circuito digitale non usa tensioni esatte: usa due intervalli. La figura li mostra per il kit. Un'uscita garantisce livelli puliti: sopra 2,64 V per un 1, sotto 0,33 V per uno 0. Un ingresso è più tollerante: legge 1 sopra 2,475 V e 0 sotto 0,825 V. La differenza tra ciò che un'uscita garantisce e ciò che un ingresso richiede è il margine di rumore: un disturbo più piccolo non può cambiare il bit. Tra le due soglie di ingresso il valore è indefinito, e i segnali devono attraversare quella fascia in fretta.
+DA COMPRENDERE OGGI: dai volt ai bit.
 Per il docente: Datasheet dell'ESP32-C6, tabella 5-4, con VDD = 3,3 V: VOH min 0,8 VDD, VOL max 0,1 VDD, VIH min 0,75 VDD, VIL max 0,25 VDD. Margini di rumore: 2,64 - 2,475 = 0,165 V in alto, 0,825 - 0,33 = 0,495 V in basso. È la soglia «metà della tensione di alimentazione» della Lezione 13, resa precisa.</a:t>
             </a:r>
             <a:endParaRPr lang="en-US" dirty="0"/>
@@ -749,6 +752,7 @@
             <a:r>
               <a:rPr lang="en-US" dirty="0"/>
               <a:t>Perché rinunciare alla ricchezza dei segnali analogici? In un circuito analogico l'informazione è il valore esatto, quindi ogni stadio aggiunge un po' di rumore, e il rumore si accumula: ogni copia è peggiore della precedente. In un circuito digitale conta solo l'intervallo, e ogni porta produce un livello fresco e pulito: il rumore non si accumula, le copie sono perfette, e gli errori si possono perfino rilevare e correggere. I circuiti analogici restano indispensabili ai bordi di un sistema, dove tocca il mondo: sensori, radio, suono.
+DA COMPRENDERE OGGI: dai volt ai bit.
 Per il docente: La storia analogico-digitale della Lezione 04, vista dal filo. L'amplificatore audio e la radio del kit sono i bordi analogici di un sistema per il resto digitale.</a:t>
             </a:r>
             <a:endParaRPr lang="en-US" dirty="0"/>
@@ -838,6 +842,7 @@
             <a:r>
               <a:rPr lang="en-US" dirty="0"/>
               <a:t>La prima porta. Un pMOS collega l'uscita all'alimentazione, un nMOS la collega a massa, ed entrambi i gate sono pilotati dallo stesso ingresso. Con l'ingresso a 0 conduce il pMOS e l'uscita vale 1; con l'ingresso a 1 conduce l'nMOS e l'uscita vale 0. È un NOT. In ogni istante conduce esattamente uno dei due transistor, quindi a ingresso fermo non scorre corrente dall'alimentazione a massa: ecco perché a riposo il CMOS non consuma quasi nulla.
+DA COMPRENDERE OGGI: le porte CMOS.
 Per il docente: CMOS: MOS complementare. Y = A'. La rete di pull-up (pMOS) e la rete di pull-down (nMOS) sono l'una la duale dell'altra, come nel principio di dualità della Lezione 08.</a:t>
             </a:r>
             <a:endParaRPr lang="en-US" dirty="0"/>
@@ -927,6 +932,7 @@
             <a:r>
               <a:rPr lang="en-US" dirty="0"/>
               <a:t>Due ingressi, quattro transistor. Nel NAND i due nMOS sono in serie: l'uscita raggiunge massa solo se A e B valgono entrambi 1. I due pMOS sono in parallelo: l'uscita raggiunge l'alimentazione se uno dei due ingressi vale 0. Serie è AND, parallelo è OR. Il NOR è il duale: serie e parallelo si scambiano, esattamente come le leggi di De Morgan scambiano AND e OR. Verificate voi entrambi i disegni per le quattro combinazioni degli ingressi, segnando quali transistor conducono.
+DA COMPRENDERE OGGI: le porte CMOS.
 Per il docente: Serie è AND, parallelo è OR: l'idea dei circuiti a commutazione di Nakajima e Shannon (Lezione 03). Quattro transistor ciascuna. Chiedere all'aula di verificare sul disegno le quattro combinazioni di ingresso.</a:t>
             </a:r>
             <a:endParaRPr lang="en-US" dirty="0"/>
@@ -1016,6 +1022,7 @@
             <a:r>
               <a:rPr lang="en-US" dirty="0"/>
               <a:t>Il costo dei circuiti in transistor. Un NOT costa 2, un NAND o un NOR 4, un AND o un OR 6, perché sono un NAND o un NOR seguito da un invertitore. Questo rovescia l'intuizione dell'algebra: in CMOS vengono prima le porte invertenti, e un AND costa più di un NAND. Un sommatore completo richiede circa 28 transistor, una cella di memoria 6, un flip-flop circa 20. Ora lo scopo della minimizzazione è concreto: meno letterali significano meno transistor, meno area, meno energia e meno tempo.
+DA COMPRENDERE OGGI: le porte CMOS.
 Per il docente: Ecco perché NAND è la porta universale della Lezione 09 in pratica oltre che in teoria: un AND costa più di un NAND. I conteggi valgono per il CMOS statico convenzionale e variano con lo stile di progetto. Trentadue sommatori completi: circa 900 transistor per l'addizionatore che sta dietro l'istruzione add.</a:t>
             </a:r>
             <a:endParaRPr lang="en-US" dirty="0"/>
@@ -1105,6 +1112,7 @@
             <a:r>
               <a:rPr lang="en-US" dirty="0"/>
               <a:t>L'uscita di una porta pilota gli ingressi di altre porte, che sono piccoli condensatori. Per cambiare livello deve caricarli o scaricarli attraverso la resistenza dei propri transistor, e questo richiede tempo: il ritardo di propagazione. Richiede anche energia, a ogni cambio di livello. La potenza spesa nel commutare è circa C per V al quadrato per f: la capacità, il quadrato della tensione di alimentazione, e la frequenza. Abbassare la tensione è ciò che fa risparmiare di più, ed è per questo che i chip sono passati da 5 V a circa 1 V all'interno. La velocità si paga in calore.
+DA COMPRENDERE OGGI: le porte CMOS. DA COMPRENDERE PIÙ AVANTI: il clock (si studia nella Lezione 13).
 Per il docente: C la capacità commutata, V l'alimentazione, f la frequenza di commutazione. Il ritardo di propagazione ritorna nella Lezione 11 come percorso critico, e nella Lezione 13 come ragione del clock. L'ESP32-C6 ha un'alimentazione a 3,3 V per i piedini e una tensione interna più bassa per la logica.</a:t>
             </a:r>
             <a:endParaRPr lang="en-US" dirty="0"/>
@@ -1194,6 +1202,7 @@
             <a:r>
               <a:rPr lang="en-US" dirty="0"/>
               <a:t>Un ingresso collegato a nulla è flottante: raccoglie rumore e legge 0 o 1 a caso. Il rimedio è una resistenza di pull-up che lega il piedino a 3,3 V. A pulsante rilasciato non scorre corrente, e il piedino legge un 1 pulito. A pulsante premuto l'interruttore collega il piedino a massa: 0 V, uno 0 pulito, e nella resistenza scorre una corrente trascurabile di 73 microampere. È un partitore di tensione il cui resistore inferiore è o infinito o zero. Il firmware poi inverte il bit, così nel vostro programma premuto vale 1.
+DA COMPRENDERE OGGI: gli ingressi con pull-up.
 Per il docente: Pull-up debole interno dell'ESP32-C6: 45 kΩ tipici (datasheet). Il firmware lo attiva su ogni piedino dei pulsanti (prg32_input.c) e legge i piedini invertiti (prg32_controller.c). Il triangolo è il buffer di ingresso del piedino. Si chiama logica attiva bassa.</a:t>
             </a:r>
             <a:endParaRPr lang="en-US" dirty="0"/>
@@ -1641,6 +1650,7 @@
             <a:r>
               <a:rPr lang="en-US" dirty="0"/>
               <a:t>Cinque conclusioni. La tensione spinge, la corrente scorre, la resistenza ostacola, e la legge di Ohm copre quasi tutto ciò che serve a un progettista digitale. Un transistor MOS è un interruttore comandato da una tensione, in due tipi complementari. Un bit è un intervallo di tensioni, reso affidabile dai margini di rumore e dalla rigenerazione dei livelli. Le porte CMOS sono coppie di reti di interruttori, e quelle invertenti sono le più economiche. Commutare costa tempo ed energia. La prossima lezione costruisce macchine con queste porte.
+Stato di apprendimento, riepilogo. DA COMPRENDERE OGGI: gli ingressi con pull-up; tensione, corrente, legge di Ohm; il transistor come interruttore; dai volt ai bit; le porte CMOS. DA UTILIZZARE OGGI: il programma completo, gli strumenti di PRG32 (si usa, non si studia, in questo corso). DA COMPRENDERE PIÙ AVANTI: il clock (Lezione 13). Una slide senza etichetta è contesto: una storia, un esempio, una domanda, un esercizio.
 Per il docente: Prossima lezione: le macchine combinatorie, costruite con queste porte.</a:t>
             </a:r>
             <a:endParaRPr lang="en-US" dirty="0"/>
@@ -1730,6 +1740,7 @@
             <a:r>
               <a:rPr lang="en-US" dirty="0"/>
               <a:t>Quattro grandezze, con l'analogia dell'acqua nei tubi. La tensione è la pressione che spinge; si misura in volt e sempre tra due punti. La corrente è la portata, in ampere. La resistenza è ciò che ostacola il flusso, in ohm. La potenza è il lavoro compiuto ogni secondo, in watt. L'ultima colonna lega ciascuna al kit: 3,3 V di alimentazione, circa 10 mA in un LED acceso, 45 kΩ dentro ogni piedino di ingresso. Ricordate la didascalia: dicendo che un piedino «sta a 3,3 V» si intende rispetto a massa, il riferimento comune.
+DA COMPRENDERE OGGI: tensione, corrente, legge di Ohm.
 Per il docente: La carica elettrica è trasportata dagli elettroni; la corrente è carica al secondo. Una tensione è sempre tra due punti: dicendo «il piedino sta a 3,3 V» si intende rispetto a massa, il riferimento comune dell'intero circuito. Prefissi: milli (m) 10^-3, micro (µ) 10^-6, kilo (k) 10^3, mega (M) 10^6.</a:t>
             </a:r>
             <a:endParaRPr lang="en-US" dirty="0"/>
@@ -1819,6 +1830,7 @@
             <a:r>
               <a:rPr lang="en-US" dirty="0"/>
               <a:t>La legge di Ohm: la tensione ai capi di un resistore è uguale alla sua resistenza per la corrente che lo attraversa. Un circuito è un anello chiuso, e il disegno mostra il più semplice tra quelli utili: un'alimentazione, un resistore e un LED. Il LED tiene per sé circa 2 V; alla resistenza vanno i restanti 1,3 V, e così fissa la corrente. Per 10 mA servono 1,3 diviso 0,010, cioè 130 Ω, e il valore commerciale più vicino è 150 Ω. Senza la resistenza la corrente sarebbe di gran lunga troppa e il LED brucerebbe.
+DA COMPRENDERE OGGI: tensione, corrente, legge di Ohm.
 Per il docente: Georg Ohm, 1827. La tensione diretta di un LED dipende dal colore: circa 1,8-2,2 V per il rosso, circa 3 V per blu e bianco. Con 150 Ω la corrente è 1,3 / 150 = 8,7 mA.</a:t>
             </a:r>
             <a:endParaRPr lang="en-US" dirty="0"/>
@@ -1908,6 +1920,7 @@
             <a:r>
               <a:rPr lang="en-US" dirty="0"/>
               <a:t>Due modi di collegare i resistori. In serie la stessa corrente attraversa entrambi e le resistenze si sommano. In parallelo la stessa tensione è ai capi di entrambi e la resistenza totale è minore di ciascuna. Due resistori in serie formano un partitore di tensione: l'uscita, presa tra i due, è l'alimentazione moltiplicata per R2 diviso R1 più R2. Con resistori uguali è metà dell'alimentazione; se R2 è molto più piccola, l'uscita è vicina a massa. Tenete a mente il partitore: spiega il pulsante alla fine della lezione.
+DA COMPRENDERE OGGI: tensione, corrente, legge di Ohm.
 Per il docente: Il partitore è la chiave del circuito di pull-up alla fine della lezione: un pulsante è un resistore che è o infinito (aperto) o quasi zero (chiuso). Parallelo: 1/R = 1/R1 + 1/R2.</a:t>
             </a:r>
             <a:endParaRPr lang="en-US" dirty="0"/>
@@ -1997,6 +2010,7 @@
             <a:r>
               <a:rPr lang="en-US" dirty="0"/>
               <a:t>Un condensatore immagazzina carica come un serbatoio l'acqua, e la sua tensione non può cambiare all'istante: va riempito o svuotato attraverso una resistenza. Il tempo necessario è dell'ordine di R per C. Per un piedino di ingresso del kit, 45 kΩ per 2 pF fanno 90 nanosecondi. Ogni filo e ogni ingresso di transistor è un piccolo condensatore, e da qui nasce il ritardo di una porta. Un condensatore carico o scarico è anche un modo di memorizzare un bit: lo ritroverete nella lezione sulla memoria.
+DA COMPRENDERE OGGI: tensione, corrente, legge di Ohm.
 Per il docente: RC è la costante di tempo: dopo RC la tensione ha percorso circa il 63% della strada. Capacità di un piedino dell'ESP32-C6: 2 pF tipici (datasheet). Fili e pulsante ne aggiungono altra, quindi il valore reale è maggiore.</a:t>
             </a:r>
             <a:endParaRPr lang="en-US" dirty="0"/>
@@ -2086,6 +2100,7 @@
             <a:r>
               <a:rPr lang="en-US" dirty="0"/>
               <a:t>I conduttori lasciano scorrere la carica; gli isolanti no. I semiconduttori stanno in mezzo, e la loro conduzione si può controllare. Il controllo si ottiene con il drogaggio: l'aggiunta di pochi atomi di un altro elemento. Nel silicio di tipo n ci sono elettroni in più, portatori negativi; nel silicio di tipo p ci sono elettroni mancanti, le lacune, che si comportano da portatori positivi. Dove una regione p incontra una regione n c'è una giunzione. Un chip è una fetta di silicio con miliardi di regioni di questo tipo, collegate da strati di metallo.
+DA COMPRENDERE OGGI: il transistor come interruttore.
 Per il docente: Il silicio è il secondo elemento più abbondante della crosta terrestre: sabbia. L'intera industria si regge sul purificarlo e drogarlo con estrema precisione.</a:t>
             </a:r>
             <a:endParaRPr lang="en-US" dirty="0"/>
@@ -2175,6 +2190,7 @@
             <a:r>
               <a:rPr lang="en-US" dirty="0"/>
               <a:t>La storia dell'interruttore senza parti mobili, in sei date. Il transistor del 1947 sostituisce la valvola termoionica. Il circuito integrato del 1958 mette più transistor su un solo pezzo di semiconduttore. Il transistor MOS del 1960 è piccolo, semplice da costruire e non richiede quasi corrente di controllo. Il CMOS, nel 1963, combina due tipi complementari così che si assorba potenza solo commutando. Nel 1971 un intero processore sta su un chip con 2300 transistor; oggi un chip ne contiene decine di miliardi.
+DA COMPRENDERE OGGI: il transistor come interruttore.
 Per il docente: Un transistor è un dispositivo a tre terminali in cui un piccolo segnale su uno controlla la corrente tra gli altri due. Usato come amplificatore ha reso portatile la radio; usato come interruttore ha reso possibile il calcolatore. Valvole e relè facevano lo stesso lavoro nei primi calcolatori della Lezione 03, un milione di volte più grandi e più lenti.</a:t>
             </a:r>
             <a:endParaRPr lang="en-US" dirty="0"/>
@@ -2264,6 +2280,7 @@
             <a:r>
               <a:rPr lang="en-US" dirty="0"/>
               <a:t>Un transistor MOS ha tre terminali: il gate controlla se la corrente può passare tra gli altri due, source e drain. I tipi sono due, e la tabella dice tutto: un nMOS conduce quando il suo gate è alto; un pMOS conduce quando il suo gate è basso. Sono complementari: ciò che chiude l'uno apre l'altro. Il gate è isolato, quindi non assorbe praticamente corrente. Un altro fatto servirà tra poco: un nMOS collega bene a massa, un pMOS collega bene all'alimentazione.
+DA COMPRENDERE OGGI: il transistor come interruttore.
 Per il docente: MOS: metallo, ossido, semiconduttore, i tre strati del gate. Il cerchietto sul gate del pMOS significa, come nei simboli logici, «attivo quando è basso». Corrente di ingresso di un piedino dell'ESP32-C6: al più 50 nA (datasheet).</a:t>
             </a:r>
             <a:endParaRPr lang="en-US" dirty="0"/>
@@ -3401,6 +3418,420 @@
       </p:pic>
       <p:sp>
         <p:nvSpPr>
+          <p:cNvPr id="15" name="Shape 12"/>
+          <p:cNvSpPr/>
+          <p:nvPr/>
+        </p:nvSpPr>
+        <p:spPr>
+          <a:xfrm>
+            <a:off x="8910777" y="91440"/>
+            <a:ext cx="2732278" cy="274320"/>
+          </a:xfrm>
+          <a:prstGeom prst="rect">
+            <a:avLst/>
+          </a:prstGeom>
+          <a:solidFill>
+            <a:srgbClr val="F3E8FF"/>
+          </a:solidFill>
+          <a:ln w="12700">
+            <a:solidFill>
+              <a:srgbClr val="7E22CE"/>
+            </a:solidFill>
+            <a:prstDash val="dash"/>
+          </a:ln>
+        </p:spPr>
+      </p:sp>
+      <p:sp>
+        <p:nvSpPr>
+          <p:cNvPr id="16" name="Shape 13"/>
+          <p:cNvSpPr/>
+          <p:nvPr/>
+        </p:nvSpPr>
+        <p:spPr>
+          <a:xfrm>
+            <a:off x="8938209" y="128016"/>
+            <a:ext cx="45720" cy="45720"/>
+          </a:xfrm>
+          <a:prstGeom prst="rect">
+            <a:avLst/>
+          </a:prstGeom>
+          <a:solidFill>
+            <a:srgbClr val="7E22CE"/>
+          </a:solidFill>
+          <a:ln w="12700">
+            <a:solidFill>
+              <a:srgbClr val="7E22CE"/>
+            </a:solidFill>
+            <a:prstDash val="solid"/>
+          </a:ln>
+        </p:spPr>
+      </p:sp>
+      <p:sp>
+        <p:nvSpPr>
+          <p:cNvPr id="17" name="Shape 14"/>
+          <p:cNvSpPr/>
+          <p:nvPr/>
+        </p:nvSpPr>
+        <p:spPr>
+          <a:xfrm>
+            <a:off x="8938209" y="205740"/>
+            <a:ext cx="45720" cy="45720"/>
+          </a:xfrm>
+          <a:prstGeom prst="rect">
+            <a:avLst/>
+          </a:prstGeom>
+          <a:solidFill>
+            <a:srgbClr val="7E22CE"/>
+          </a:solidFill>
+          <a:ln w="12700">
+            <a:solidFill>
+              <a:srgbClr val="7E22CE"/>
+            </a:solidFill>
+            <a:prstDash val="solid"/>
+          </a:ln>
+        </p:spPr>
+      </p:sp>
+      <p:sp>
+        <p:nvSpPr>
+          <p:cNvPr id="18" name="Shape 15"/>
+          <p:cNvSpPr/>
+          <p:nvPr/>
+        </p:nvSpPr>
+        <p:spPr>
+          <a:xfrm>
+            <a:off x="8938209" y="283464"/>
+            <a:ext cx="45720" cy="45720"/>
+          </a:xfrm>
+          <a:prstGeom prst="rect">
+            <a:avLst/>
+          </a:prstGeom>
+          <a:solidFill>
+            <a:srgbClr val="7E22CE"/>
+          </a:solidFill>
+          <a:ln w="12700">
+            <a:solidFill>
+              <a:srgbClr val="7E22CE"/>
+            </a:solidFill>
+            <a:prstDash val="solid"/>
+          </a:ln>
+        </p:spPr>
+      </p:sp>
+      <p:pic>
+        <p:nvPicPr>
+          <p:cNvPr id="19" name="Image 1" descr="preencoded.png">    </p:cNvPr>
+          <p:cNvPicPr>
+            <a:picLocks noChangeAspect="1"/>
+          </p:cNvPicPr>
+          <p:nvPr/>
+        </p:nvPicPr>
+        <p:blipFill>
+          <a:blip r:embed="rId2"/>
+          <a:stretch>
+            <a:fillRect/>
+          </a:stretch>
+        </p:blipFill>
+        <p:spPr>
+          <a:xfrm>
+            <a:off x="9038793" y="128016"/>
+            <a:ext cx="201168" cy="201168"/>
+          </a:xfrm>
+          <a:prstGeom prst="rect">
+            <a:avLst/>
+          </a:prstGeom>
+        </p:spPr>
+      </p:pic>
+      <p:sp>
+        <p:nvSpPr>
+          <p:cNvPr id="20" name="Text 16"/>
+          <p:cNvSpPr txBox="1"/>
+          <p:nvPr/>
+        </p:nvSpPr>
+        <p:spPr>
+          <a:xfrm>
+            <a:off x="9294825" y="91440"/>
+            <a:ext cx="2311654" cy="274320"/>
+          </a:xfrm>
+          <a:prstGeom prst="rect">
+            <a:avLst/>
+          </a:prstGeom>
+          <a:noFill/>
+          <a:ln/>
+        </p:spPr>
+        <p:txBody>
+          <a:bodyPr wrap="square" lIns="0" tIns="0" rIns="0" bIns="0" rtlCol="0" anchor="ctr"/>
+          <a:lstStyle/>
+          <a:p>
+            <a:pPr indent="0" marL="0">
+              <a:buNone/>
+            </a:pPr>
+            <a:r>
+              <a:rPr lang="en-US" sz="1100" b="1" dirty="0">
+                <a:solidFill>
+                  <a:srgbClr val="6B21A8"/>
+                </a:solidFill>
+                <a:latin typeface="Calibri" pitchFamily="34" charset="0"/>
+                <a:ea typeface="Calibri" pitchFamily="34" charset="-122"/>
+                <a:cs typeface="Calibri" pitchFamily="34" charset="-120"/>
+              </a:rPr>
+              <a:t>DA COMPRENDERE PIÙ AVANTI</a:t>
+            </a:r>
+            <a:endParaRPr lang="en-US" sz="1100" dirty="0"/>
+          </a:p>
+        </p:txBody>
+      </p:sp>
+      <p:sp>
+        <p:nvSpPr>
+          <p:cNvPr id="21" name="Shape 17"/>
+          <p:cNvSpPr/>
+          <p:nvPr/>
+        </p:nvSpPr>
+        <p:spPr>
+          <a:xfrm>
+            <a:off x="6675069" y="91440"/>
+            <a:ext cx="2125980" cy="274320"/>
+          </a:xfrm>
+          <a:prstGeom prst="rect">
+            <a:avLst/>
+          </a:prstGeom>
+          <a:solidFill>
+            <a:srgbClr val="FEF3C7"/>
+          </a:solidFill>
+          <a:ln w="12700">
+            <a:solidFill>
+              <a:srgbClr val="B45309"/>
+            </a:solidFill>
+            <a:prstDash val="solid"/>
+          </a:ln>
+        </p:spPr>
+      </p:sp>
+      <p:sp>
+        <p:nvSpPr>
+          <p:cNvPr id="22" name="Shape 18"/>
+          <p:cNvSpPr/>
+          <p:nvPr/>
+        </p:nvSpPr>
+        <p:spPr>
+          <a:xfrm>
+            <a:off x="6675069" y="91440"/>
+            <a:ext cx="27432" cy="274320"/>
+          </a:xfrm>
+          <a:prstGeom prst="rect">
+            <a:avLst/>
+          </a:prstGeom>
+          <a:solidFill>
+            <a:srgbClr val="B45309"/>
+          </a:solidFill>
+          <a:ln w="12700">
+            <a:solidFill>
+              <a:srgbClr val="B45309"/>
+            </a:solidFill>
+            <a:prstDash val="solid"/>
+          </a:ln>
+        </p:spPr>
+      </p:sp>
+      <p:sp>
+        <p:nvSpPr>
+          <p:cNvPr id="23" name="Shape 19"/>
+          <p:cNvSpPr/>
+          <p:nvPr/>
+        </p:nvSpPr>
+        <p:spPr>
+          <a:xfrm>
+            <a:off x="6729933" y="91440"/>
+            <a:ext cx="27432" cy="274320"/>
+          </a:xfrm>
+          <a:prstGeom prst="rect">
+            <a:avLst/>
+          </a:prstGeom>
+          <a:solidFill>
+            <a:srgbClr val="B45309"/>
+          </a:solidFill>
+          <a:ln w="12700">
+            <a:solidFill>
+              <a:srgbClr val="B45309"/>
+            </a:solidFill>
+            <a:prstDash val="solid"/>
+          </a:ln>
+        </p:spPr>
+      </p:sp>
+      <p:pic>
+        <p:nvPicPr>
+          <p:cNvPr id="24" name="Image 2" descr="preencoded.png">    </p:cNvPr>
+          <p:cNvPicPr>
+            <a:picLocks noChangeAspect="1"/>
+          </p:cNvPicPr>
+          <p:nvPr/>
+        </p:nvPicPr>
+        <p:blipFill>
+          <a:blip r:embed="rId3"/>
+          <a:stretch>
+            <a:fillRect/>
+          </a:stretch>
+        </p:blipFill>
+        <p:spPr>
+          <a:xfrm>
+            <a:off x="6803085" y="128016"/>
+            <a:ext cx="201168" cy="201168"/>
+          </a:xfrm>
+          <a:prstGeom prst="rect">
+            <a:avLst/>
+          </a:prstGeom>
+        </p:spPr>
+      </p:pic>
+      <p:sp>
+        <p:nvSpPr>
+          <p:cNvPr id="25" name="Text 20"/>
+          <p:cNvSpPr txBox="1"/>
+          <p:nvPr/>
+        </p:nvSpPr>
+        <p:spPr>
+          <a:xfrm>
+            <a:off x="7059117" y="91440"/>
+            <a:ext cx="1705356" cy="274320"/>
+          </a:xfrm>
+          <a:prstGeom prst="rect">
+            <a:avLst/>
+          </a:prstGeom>
+          <a:noFill/>
+          <a:ln/>
+        </p:spPr>
+        <p:txBody>
+          <a:bodyPr wrap="square" lIns="0" tIns="0" rIns="0" bIns="0" rtlCol="0" anchor="ctr"/>
+          <a:lstStyle/>
+          <a:p>
+            <a:pPr indent="0" marL="0">
+              <a:buNone/>
+            </a:pPr>
+            <a:r>
+              <a:rPr lang="en-US" sz="1100" b="1" dirty="0">
+                <a:solidFill>
+                  <a:srgbClr val="92400E"/>
+                </a:solidFill>
+                <a:latin typeface="Calibri" pitchFamily="34" charset="0"/>
+                <a:ea typeface="Calibri" pitchFamily="34" charset="-122"/>
+                <a:cs typeface="Calibri" pitchFamily="34" charset="-120"/>
+              </a:rPr>
+              <a:t>DA UTILIZZARE OGGI</a:t>
+            </a:r>
+            <a:endParaRPr lang="en-US" sz="1100" dirty="0"/>
+          </a:p>
+        </p:txBody>
+      </p:sp>
+      <p:sp>
+        <p:nvSpPr>
+          <p:cNvPr id="26" name="Shape 21"/>
+          <p:cNvSpPr/>
+          <p:nvPr/>
+        </p:nvSpPr>
+        <p:spPr>
+          <a:xfrm>
+            <a:off x="4352747" y="91440"/>
+            <a:ext cx="2212594" cy="274320"/>
+          </a:xfrm>
+          <a:prstGeom prst="rect">
+            <a:avLst/>
+          </a:prstGeom>
+          <a:solidFill>
+            <a:srgbClr val="E0F2FE"/>
+          </a:solidFill>
+          <a:ln w="12700">
+            <a:solidFill>
+              <a:srgbClr val="0369A1"/>
+            </a:solidFill>
+            <a:prstDash val="solid"/>
+          </a:ln>
+        </p:spPr>
+      </p:sp>
+      <p:sp>
+        <p:nvSpPr>
+          <p:cNvPr id="27" name="Shape 22"/>
+          <p:cNvSpPr/>
+          <p:nvPr/>
+        </p:nvSpPr>
+        <p:spPr>
+          <a:xfrm>
+            <a:off x="4352747" y="91440"/>
+            <a:ext cx="73152" cy="274320"/>
+          </a:xfrm>
+          <a:prstGeom prst="rect">
+            <a:avLst/>
+          </a:prstGeom>
+          <a:solidFill>
+            <a:srgbClr val="0369A1"/>
+          </a:solidFill>
+          <a:ln w="12700">
+            <a:solidFill>
+              <a:srgbClr val="0369A1"/>
+            </a:solidFill>
+            <a:prstDash val="solid"/>
+          </a:ln>
+        </p:spPr>
+      </p:sp>
+      <p:pic>
+        <p:nvPicPr>
+          <p:cNvPr id="28" name="Image 3" descr="preencoded.png">    </p:cNvPr>
+          <p:cNvPicPr>
+            <a:picLocks noChangeAspect="1"/>
+          </p:cNvPicPr>
+          <p:nvPr/>
+        </p:nvPicPr>
+        <p:blipFill>
+          <a:blip r:embed="rId4"/>
+          <a:stretch>
+            <a:fillRect/>
+          </a:stretch>
+        </p:blipFill>
+        <p:spPr>
+          <a:xfrm>
+            <a:off x="4480763" y="128016"/>
+            <a:ext cx="201168" cy="201168"/>
+          </a:xfrm>
+          <a:prstGeom prst="rect">
+            <a:avLst/>
+          </a:prstGeom>
+        </p:spPr>
+      </p:pic>
+      <p:sp>
+        <p:nvSpPr>
+          <p:cNvPr id="29" name="Text 23"/>
+          <p:cNvSpPr txBox="1"/>
+          <p:nvPr/>
+        </p:nvSpPr>
+        <p:spPr>
+          <a:xfrm>
+            <a:off x="4736795" y="91440"/>
+            <a:ext cx="1791970" cy="274320"/>
+          </a:xfrm>
+          <a:prstGeom prst="rect">
+            <a:avLst/>
+          </a:prstGeom>
+          <a:noFill/>
+          <a:ln/>
+        </p:spPr>
+        <p:txBody>
+          <a:bodyPr wrap="square" lIns="0" tIns="0" rIns="0" bIns="0" rtlCol="0" anchor="ctr"/>
+          <a:lstStyle/>
+          <a:p>
+            <a:pPr indent="0" marL="0">
+              <a:buNone/>
+            </a:pPr>
+            <a:r>
+              <a:rPr lang="en-US" sz="1100" b="1" dirty="0">
+                <a:solidFill>
+                  <a:srgbClr val="075985"/>
+                </a:solidFill>
+                <a:latin typeface="Calibri" pitchFamily="34" charset="0"/>
+                <a:ea typeface="Calibri" pitchFamily="34" charset="-122"/>
+                <a:cs typeface="Calibri" pitchFamily="34" charset="-120"/>
+              </a:rPr>
+              <a:t>DA COMPRENDERE OGGI</a:t>
+            </a:r>
+            <a:endParaRPr lang="en-US" sz="1100" dirty="0"/>
+          </a:p>
+        </p:txBody>
+      </p:sp>
+      <p:sp>
+        <p:nvSpPr>
           <p:cNvPr id="25" name="Slide Number Placeholder 0"/>
           <p:cNvSpPr>
             <a:spLocks noGrp="1"/>
@@ -3540,9 +3971,59 @@
           </a:ln>
         </p:spPr>
       </p:sp>
+      <p:sp>
+        <p:nvSpPr>
+          <p:cNvPr id="4" name="Shape 2"/>
+          <p:cNvSpPr/>
+          <p:nvPr/>
+        </p:nvSpPr>
+        <p:spPr>
+          <a:xfrm>
+            <a:off x="8248599" y="91440"/>
+            <a:ext cx="3394456" cy="274320"/>
+          </a:xfrm>
+          <a:prstGeom prst="rect">
+            <a:avLst/>
+          </a:prstGeom>
+          <a:solidFill>
+            <a:srgbClr val="E0F2FE"/>
+          </a:solidFill>
+          <a:ln w="12700">
+            <a:solidFill>
+              <a:srgbClr val="0369A1"/>
+            </a:solidFill>
+            <a:prstDash val="solid"/>
+          </a:ln>
+        </p:spPr>
+      </p:sp>
+      <p:sp>
+        <p:nvSpPr>
+          <p:cNvPr id="5" name="Shape 3"/>
+          <p:cNvSpPr/>
+          <p:nvPr/>
+        </p:nvSpPr>
+        <p:spPr>
+          <a:xfrm>
+            <a:off x="8248599" y="91440"/>
+            <a:ext cx="73152" cy="274320"/>
+          </a:xfrm>
+          <a:prstGeom prst="rect">
+            <a:avLst/>
+          </a:prstGeom>
+          <a:solidFill>
+            <a:srgbClr val="0369A1"/>
+          </a:solidFill>
+          <a:ln w="12700">
+            <a:solidFill>
+              <a:srgbClr val="0369A1"/>
+            </a:solidFill>
+            <a:prstDash val="solid"/>
+          </a:ln>
+        </p:spPr>
+      </p:sp>
       <p:pic>
         <p:nvPicPr>
-          <p:cNvPr id="5" name="Image 0" descr="preencoded.png">    </p:cNvPr>
+          <p:cNvPr id="6" name="Image 0" descr="preencoded.png">    </p:cNvPr>
           <p:cNvPicPr>
             <a:picLocks noChangeAspect="1"/>
           </p:cNvPicPr>
@@ -3556,6 +4037,83 @@
         </p:blipFill>
         <p:spPr>
           <a:xfrm>
+            <a:off x="8376615" y="128016"/>
+            <a:ext cx="201168" cy="201168"/>
+          </a:xfrm>
+          <a:prstGeom prst="rect">
+            <a:avLst/>
+          </a:prstGeom>
+        </p:spPr>
+      </p:pic>
+      <p:sp>
+        <p:nvSpPr>
+          <p:cNvPr id="7" name="Text 4"/>
+          <p:cNvSpPr txBox="1"/>
+          <p:nvPr/>
+        </p:nvSpPr>
+        <p:spPr>
+          <a:xfrm>
+            <a:off x="8632647" y="91440"/>
+            <a:ext cx="2973832" cy="274320"/>
+          </a:xfrm>
+          <a:prstGeom prst="rect">
+            <a:avLst/>
+          </a:prstGeom>
+          <a:noFill/>
+          <a:ln/>
+        </p:spPr>
+        <p:txBody>
+          <a:bodyPr wrap="square" lIns="0" tIns="0" rIns="0" bIns="0" rtlCol="0" anchor="ctr"/>
+          <a:lstStyle/>
+          <a:p>
+            <a:pPr indent="0" marL="0">
+              <a:buNone/>
+            </a:pPr>
+            <a:r>
+              <a:rPr lang="en-US" sz="1100" b="1" dirty="0">
+                <a:solidFill>
+                  <a:srgbClr val="075985"/>
+                </a:solidFill>
+                <a:latin typeface="Calibri" pitchFamily="34" charset="0"/>
+                <a:ea typeface="Calibri" pitchFamily="34" charset="-122"/>
+                <a:cs typeface="Calibri" pitchFamily="34" charset="-120"/>
+              </a:rPr>
+              <a:t>DA COMPRENDERE OGGI</a:t>
+            </a:r>
+            <a:pPr indent="0" marL="0">
+              <a:buNone/>
+            </a:pPr>
+            <a:r>
+              <a:rPr lang="en-US" sz="1100" dirty="0">
+                <a:solidFill>
+                  <a:srgbClr val="075985"/>
+                </a:solidFill>
+                <a:latin typeface="Calibri" pitchFamily="34" charset="0"/>
+                <a:ea typeface="Calibri" pitchFamily="34" charset="-122"/>
+                <a:cs typeface="Calibri" pitchFamily="34" charset="-120"/>
+              </a:rPr>
+              <a:t> · dai volt ai bit</a:t>
+            </a:r>
+            <a:endParaRPr lang="en-US" sz="1100" dirty="0"/>
+          </a:p>
+        </p:txBody>
+      </p:sp>
+      <p:pic>
+        <p:nvPicPr>
+          <p:cNvPr id="9" name="Image 1" descr="preencoded.png">    </p:cNvPr>
+          <p:cNvPicPr>
+            <a:picLocks noChangeAspect="1"/>
+          </p:cNvPicPr>
+          <p:nvPr/>
+        </p:nvPicPr>
+        <p:blipFill>
+          <a:blip r:embed="rId2"/>
+          <a:stretch>
+            <a:fillRect/>
+          </a:stretch>
+        </p:blipFill>
+        <p:spPr>
+          <a:xfrm>
             <a:off x="685800" y="2159889"/>
             <a:ext cx="5486400" cy="3269742"/>
           </a:xfrm>
@@ -3566,7 +4124,7 @@
       </p:pic>
       <p:sp>
         <p:nvSpPr>
-          <p:cNvPr id="6" name="Shape 2"/>
+          <p:cNvPr id="10" name="Shape 5"/>
           <p:cNvSpPr/>
           <p:nvPr/>
         </p:nvSpPr>
@@ -3591,7 +4149,7 @@
       </p:sp>
       <p:sp>
         <p:nvSpPr>
-          <p:cNvPr id="7" name="Text 3"/>
+          <p:cNvPr id="11" name="Text 6"/>
           <p:cNvSpPr txBox="1"/>
           <p:nvPr/>
         </p:nvSpPr>
@@ -3633,7 +4191,7 @@
       </p:sp>
       <p:sp>
         <p:nvSpPr>
-          <p:cNvPr id="8" name="Shape 4"/>
+          <p:cNvPr id="12" name="Shape 7"/>
           <p:cNvSpPr/>
           <p:nvPr/>
         </p:nvSpPr>
@@ -3658,7 +4216,7 @@
       </p:sp>
       <p:sp>
         <p:nvSpPr>
-          <p:cNvPr id="9" name="Text 5"/>
+          <p:cNvPr id="13" name="Text 8"/>
           <p:cNvSpPr txBox="1"/>
           <p:nvPr/>
         </p:nvSpPr>
@@ -3720,7 +4278,7 @@
       </p:sp>
       <p:sp>
         <p:nvSpPr>
-          <p:cNvPr id="10" name="Shape 6"/>
+          <p:cNvPr id="14" name="Shape 9"/>
           <p:cNvSpPr/>
           <p:nvPr/>
         </p:nvSpPr>
@@ -3745,7 +4303,7 @@
       </p:sp>
       <p:sp>
         <p:nvSpPr>
-          <p:cNvPr id="11" name="Text 7"/>
+          <p:cNvPr id="15" name="Text 10"/>
           <p:cNvSpPr txBox="1"/>
           <p:nvPr/>
         </p:nvSpPr>
@@ -3807,7 +4365,7 @@
       </p:sp>
       <p:sp>
         <p:nvSpPr>
-          <p:cNvPr id="12" name="Shape 8"/>
+          <p:cNvPr id="16" name="Shape 11"/>
           <p:cNvSpPr/>
           <p:nvPr/>
         </p:nvSpPr>
@@ -3832,7 +4390,7 @@
       </p:sp>
       <p:sp>
         <p:nvSpPr>
-          <p:cNvPr id="13" name="Text 9"/>
+          <p:cNvPr id="17" name="Text 12"/>
           <p:cNvSpPr txBox="1"/>
           <p:nvPr/>
         </p:nvSpPr>
@@ -3874,7 +4432,7 @@
       </p:sp>
       <p:sp>
         <p:nvSpPr>
-          <p:cNvPr id="14" name="Shape 10"/>
+          <p:cNvPr id="18" name="Shape 13"/>
           <p:cNvSpPr/>
           <p:nvPr/>
         </p:nvSpPr>
@@ -3899,7 +4457,7 @@
       </p:sp>
       <p:sp>
         <p:nvSpPr>
-          <p:cNvPr id="15" name="Text 11"/>
+          <p:cNvPr id="19" name="Text 14"/>
           <p:cNvSpPr txBox="1"/>
           <p:nvPr/>
         </p:nvSpPr>
@@ -4415,6 +4973,133 @@
       </p:sp>
       <p:sp>
         <p:nvSpPr>
+          <p:cNvPr id="9" name="Shape 7"/>
+          <p:cNvSpPr/>
+          <p:nvPr/>
+        </p:nvSpPr>
+        <p:spPr>
+          <a:xfrm>
+            <a:off x="8248599" y="91440"/>
+            <a:ext cx="3394456" cy="274320"/>
+          </a:xfrm>
+          <a:prstGeom prst="rect">
+            <a:avLst/>
+          </a:prstGeom>
+          <a:solidFill>
+            <a:srgbClr val="E0F2FE"/>
+          </a:solidFill>
+          <a:ln w="12700">
+            <a:solidFill>
+              <a:srgbClr val="0369A1"/>
+            </a:solidFill>
+            <a:prstDash val="solid"/>
+          </a:ln>
+        </p:spPr>
+      </p:sp>
+      <p:sp>
+        <p:nvSpPr>
+          <p:cNvPr id="10" name="Shape 8"/>
+          <p:cNvSpPr/>
+          <p:nvPr/>
+        </p:nvSpPr>
+        <p:spPr>
+          <a:xfrm>
+            <a:off x="8248599" y="91440"/>
+            <a:ext cx="73152" cy="274320"/>
+          </a:xfrm>
+          <a:prstGeom prst="rect">
+            <a:avLst/>
+          </a:prstGeom>
+          <a:solidFill>
+            <a:srgbClr val="0369A1"/>
+          </a:solidFill>
+          <a:ln w="12700">
+            <a:solidFill>
+              <a:srgbClr val="0369A1"/>
+            </a:solidFill>
+            <a:prstDash val="solid"/>
+          </a:ln>
+        </p:spPr>
+      </p:sp>
+      <p:pic>
+        <p:nvPicPr>
+          <p:cNvPr id="11" name="Image 0" descr="preencoded.png">    </p:cNvPr>
+          <p:cNvPicPr>
+            <a:picLocks noChangeAspect="1"/>
+          </p:cNvPicPr>
+          <p:nvPr/>
+        </p:nvPicPr>
+        <p:blipFill>
+          <a:blip r:embed="rId1"/>
+          <a:stretch>
+            <a:fillRect/>
+          </a:stretch>
+        </p:blipFill>
+        <p:spPr>
+          <a:xfrm>
+            <a:off x="8376615" y="128016"/>
+            <a:ext cx="201168" cy="201168"/>
+          </a:xfrm>
+          <a:prstGeom prst="rect">
+            <a:avLst/>
+          </a:prstGeom>
+        </p:spPr>
+      </p:pic>
+      <p:sp>
+        <p:nvSpPr>
+          <p:cNvPr id="12" name="Text 9"/>
+          <p:cNvSpPr txBox="1"/>
+          <p:nvPr/>
+        </p:nvSpPr>
+        <p:spPr>
+          <a:xfrm>
+            <a:off x="8632647" y="91440"/>
+            <a:ext cx="2973832" cy="274320"/>
+          </a:xfrm>
+          <a:prstGeom prst="rect">
+            <a:avLst/>
+          </a:prstGeom>
+          <a:noFill/>
+          <a:ln/>
+        </p:spPr>
+        <p:txBody>
+          <a:bodyPr wrap="square" lIns="0" tIns="0" rIns="0" bIns="0" rtlCol="0" anchor="ctr"/>
+          <a:lstStyle/>
+          <a:p>
+            <a:pPr indent="0" marL="0">
+              <a:buNone/>
+            </a:pPr>
+            <a:r>
+              <a:rPr lang="en-US" sz="1100" b="1" dirty="0">
+                <a:solidFill>
+                  <a:srgbClr val="075985"/>
+                </a:solidFill>
+                <a:latin typeface="Calibri" pitchFamily="34" charset="0"/>
+                <a:ea typeface="Calibri" pitchFamily="34" charset="-122"/>
+                <a:cs typeface="Calibri" pitchFamily="34" charset="-120"/>
+              </a:rPr>
+              <a:t>DA COMPRENDERE OGGI</a:t>
+            </a:r>
+            <a:pPr indent="0" marL="0">
+              <a:buNone/>
+            </a:pPr>
+            <a:r>
+              <a:rPr lang="en-US" sz="1100" dirty="0">
+                <a:solidFill>
+                  <a:srgbClr val="075985"/>
+                </a:solidFill>
+                <a:latin typeface="Calibri" pitchFamily="34" charset="0"/>
+                <a:ea typeface="Calibri" pitchFamily="34" charset="-122"/>
+                <a:cs typeface="Calibri" pitchFamily="34" charset="-120"/>
+              </a:rPr>
+              <a:t> · dai volt ai bit</a:t>
+            </a:r>
+            <a:endParaRPr lang="en-US" sz="1100" dirty="0"/>
+          </a:p>
+        </p:txBody>
+      </p:sp>
+      <p:sp>
+        <p:nvSpPr>
           <p:cNvPr id="25" name="Slide Number Placeholder 0"/>
           <p:cNvSpPr>
             <a:spLocks noGrp="1"/>
@@ -4554,9 +5239,59 @@
           </a:ln>
         </p:spPr>
       </p:sp>
+      <p:sp>
+        <p:nvSpPr>
+          <p:cNvPr id="4" name="Shape 2"/>
+          <p:cNvSpPr/>
+          <p:nvPr/>
+        </p:nvSpPr>
+        <p:spPr>
+          <a:xfrm>
+            <a:off x="8379917" y="91440"/>
+            <a:ext cx="3263138" cy="274320"/>
+          </a:xfrm>
+          <a:prstGeom prst="rect">
+            <a:avLst/>
+          </a:prstGeom>
+          <a:solidFill>
+            <a:srgbClr val="E0F2FE"/>
+          </a:solidFill>
+          <a:ln w="12700">
+            <a:solidFill>
+              <a:srgbClr val="0369A1"/>
+            </a:solidFill>
+            <a:prstDash val="solid"/>
+          </a:ln>
+        </p:spPr>
+      </p:sp>
+      <p:sp>
+        <p:nvSpPr>
+          <p:cNvPr id="5" name="Shape 3"/>
+          <p:cNvSpPr/>
+          <p:nvPr/>
+        </p:nvSpPr>
+        <p:spPr>
+          <a:xfrm>
+            <a:off x="8379917" y="91440"/>
+            <a:ext cx="73152" cy="274320"/>
+          </a:xfrm>
+          <a:prstGeom prst="rect">
+            <a:avLst/>
+          </a:prstGeom>
+          <a:solidFill>
+            <a:srgbClr val="0369A1"/>
+          </a:solidFill>
+          <a:ln w="12700">
+            <a:solidFill>
+              <a:srgbClr val="0369A1"/>
+            </a:solidFill>
+            <a:prstDash val="solid"/>
+          </a:ln>
+        </p:spPr>
+      </p:sp>
       <p:pic>
         <p:nvPicPr>
-          <p:cNvPr id="5" name="Image 0" descr="preencoded.png">    </p:cNvPr>
+          <p:cNvPr id="6" name="Image 0" descr="preencoded.png">    </p:cNvPr>
           <p:cNvPicPr>
             <a:picLocks noChangeAspect="1"/>
           </p:cNvPicPr>
@@ -4564,6 +5299,83 @@
         </p:nvPicPr>
         <p:blipFill>
           <a:blip r:embed="rId1"/>
+          <a:stretch>
+            <a:fillRect/>
+          </a:stretch>
+        </p:blipFill>
+        <p:spPr>
+          <a:xfrm>
+            <a:off x="8507933" y="128016"/>
+            <a:ext cx="201168" cy="201168"/>
+          </a:xfrm>
+          <a:prstGeom prst="rect">
+            <a:avLst/>
+          </a:prstGeom>
+        </p:spPr>
+      </p:pic>
+      <p:sp>
+        <p:nvSpPr>
+          <p:cNvPr id="7" name="Text 4"/>
+          <p:cNvSpPr txBox="1"/>
+          <p:nvPr/>
+        </p:nvSpPr>
+        <p:spPr>
+          <a:xfrm>
+            <a:off x="8763965" y="91440"/>
+            <a:ext cx="2842514" cy="274320"/>
+          </a:xfrm>
+          <a:prstGeom prst="rect">
+            <a:avLst/>
+          </a:prstGeom>
+          <a:noFill/>
+          <a:ln/>
+        </p:spPr>
+        <p:txBody>
+          <a:bodyPr wrap="square" lIns="0" tIns="0" rIns="0" bIns="0" rtlCol="0" anchor="ctr"/>
+          <a:lstStyle/>
+          <a:p>
+            <a:pPr indent="0" marL="0">
+              <a:buNone/>
+            </a:pPr>
+            <a:r>
+              <a:rPr lang="en-US" sz="1100" b="1" dirty="0">
+                <a:solidFill>
+                  <a:srgbClr val="075985"/>
+                </a:solidFill>
+                <a:latin typeface="Calibri" pitchFamily="34" charset="0"/>
+                <a:ea typeface="Calibri" pitchFamily="34" charset="-122"/>
+                <a:cs typeface="Calibri" pitchFamily="34" charset="-120"/>
+              </a:rPr>
+              <a:t>DA COMPRENDERE OGGI</a:t>
+            </a:r>
+            <a:pPr indent="0" marL="0">
+              <a:buNone/>
+            </a:pPr>
+            <a:r>
+              <a:rPr lang="en-US" sz="1100" dirty="0">
+                <a:solidFill>
+                  <a:srgbClr val="075985"/>
+                </a:solidFill>
+                <a:latin typeface="Calibri" pitchFamily="34" charset="0"/>
+                <a:ea typeface="Calibri" pitchFamily="34" charset="-122"/>
+                <a:cs typeface="Calibri" pitchFamily="34" charset="-120"/>
+              </a:rPr>
+              <a:t> · le porte CMOS</a:t>
+            </a:r>
+            <a:endParaRPr lang="en-US" sz="1100" dirty="0"/>
+          </a:p>
+        </p:txBody>
+      </p:sp>
+      <p:pic>
+        <p:nvPicPr>
+          <p:cNvPr id="9" name="Image 1" descr="preencoded.png">    </p:cNvPr>
+          <p:cNvPicPr>
+            <a:picLocks noChangeAspect="1"/>
+          </p:cNvPicPr>
+          <p:nvPr/>
+        </p:nvPicPr>
+        <p:blipFill>
+          <a:blip r:embed="rId2"/>
           <a:stretch>
             <a:fillRect/>
           </a:stretch>
@@ -5434,7 +6246,7 @@
       </p:graphicFrame>
       <p:sp>
         <p:nvSpPr>
-          <p:cNvPr id="7" name="Shape 2"/>
+          <p:cNvPr id="11" name="Shape 5"/>
           <p:cNvSpPr/>
           <p:nvPr/>
         </p:nvSpPr>
@@ -5459,7 +6271,7 @@
       </p:sp>
       <p:sp>
         <p:nvSpPr>
-          <p:cNvPr id="8" name="Text 3"/>
+          <p:cNvPr id="12" name="Text 6"/>
           <p:cNvSpPr txBox="1"/>
           <p:nvPr/>
         </p:nvSpPr>
@@ -5501,7 +6313,7 @@
       </p:sp>
       <p:sp>
         <p:nvSpPr>
-          <p:cNvPr id="9" name="Shape 4"/>
+          <p:cNvPr id="13" name="Shape 7"/>
           <p:cNvSpPr/>
           <p:nvPr/>
         </p:nvSpPr>
@@ -5526,7 +6338,7 @@
       </p:sp>
       <p:sp>
         <p:nvSpPr>
-          <p:cNvPr id="10" name="Text 5"/>
+          <p:cNvPr id="14" name="Text 8"/>
           <p:cNvSpPr txBox="1"/>
           <p:nvPr/>
         </p:nvSpPr>
@@ -5568,7 +6380,7 @@
       </p:sp>
       <p:sp>
         <p:nvSpPr>
-          <p:cNvPr id="11" name="Shape 6"/>
+          <p:cNvPr id="15" name="Shape 9"/>
           <p:cNvSpPr/>
           <p:nvPr/>
         </p:nvSpPr>
@@ -5593,7 +6405,7 @@
       </p:sp>
       <p:sp>
         <p:nvSpPr>
-          <p:cNvPr id="12" name="Text 7"/>
+          <p:cNvPr id="16" name="Text 10"/>
           <p:cNvSpPr txBox="1"/>
           <p:nvPr/>
         </p:nvSpPr>
@@ -5635,7 +6447,7 @@
       </p:sp>
       <p:sp>
         <p:nvSpPr>
-          <p:cNvPr id="13" name="Shape 8"/>
+          <p:cNvPr id="17" name="Shape 11"/>
           <p:cNvSpPr/>
           <p:nvPr/>
         </p:nvSpPr>
@@ -5660,7 +6472,7 @@
       </p:sp>
       <p:sp>
         <p:nvSpPr>
-          <p:cNvPr id="14" name="Text 9"/>
+          <p:cNvPr id="18" name="Text 12"/>
           <p:cNvSpPr txBox="1"/>
           <p:nvPr/>
         </p:nvSpPr>
@@ -5946,9 +6758,59 @@
           </a:p>
         </p:txBody>
       </p:sp>
+      <p:sp>
+        <p:nvSpPr>
+          <p:cNvPr id="7" name="Shape 5"/>
+          <p:cNvSpPr/>
+          <p:nvPr/>
+        </p:nvSpPr>
+        <p:spPr>
+          <a:xfrm>
+            <a:off x="8379917" y="91440"/>
+            <a:ext cx="3263138" cy="274320"/>
+          </a:xfrm>
+          <a:prstGeom prst="rect">
+            <a:avLst/>
+          </a:prstGeom>
+          <a:solidFill>
+            <a:srgbClr val="E0F2FE"/>
+          </a:solidFill>
+          <a:ln w="12700">
+            <a:solidFill>
+              <a:srgbClr val="0369A1"/>
+            </a:solidFill>
+            <a:prstDash val="solid"/>
+          </a:ln>
+        </p:spPr>
+      </p:sp>
+      <p:sp>
+        <p:nvSpPr>
+          <p:cNvPr id="8" name="Shape 6"/>
+          <p:cNvSpPr/>
+          <p:nvPr/>
+        </p:nvSpPr>
+        <p:spPr>
+          <a:xfrm>
+            <a:off x="8379917" y="91440"/>
+            <a:ext cx="73152" cy="274320"/>
+          </a:xfrm>
+          <a:prstGeom prst="rect">
+            <a:avLst/>
+          </a:prstGeom>
+          <a:solidFill>
+            <a:srgbClr val="0369A1"/>
+          </a:solidFill>
+          <a:ln w="12700">
+            <a:solidFill>
+              <a:srgbClr val="0369A1"/>
+            </a:solidFill>
+            <a:prstDash val="solid"/>
+          </a:ln>
+        </p:spPr>
+      </p:sp>
       <p:pic>
         <p:nvPicPr>
-          <p:cNvPr id="8" name="Image 0" descr="preencoded.png">    </p:cNvPr>
+          <p:cNvPr id="9" name="Image 0" descr="preencoded.png">    </p:cNvPr>
           <p:cNvPicPr>
             <a:picLocks noChangeAspect="1"/>
           </p:cNvPicPr>
@@ -5962,17 +6824,70 @@
         </p:blipFill>
         <p:spPr>
           <a:xfrm>
-            <a:off x="1447926" y="1874520"/>
-            <a:ext cx="3565756" cy="3383280"/>
+            <a:off x="8507933" y="128016"/>
+            <a:ext cx="201168" cy="201168"/>
           </a:xfrm>
           <a:prstGeom prst="rect">
             <a:avLst/>
           </a:prstGeom>
         </p:spPr>
       </p:pic>
+      <p:sp>
+        <p:nvSpPr>
+          <p:cNvPr id="10" name="Text 7"/>
+          <p:cNvSpPr txBox="1"/>
+          <p:nvPr/>
+        </p:nvSpPr>
+        <p:spPr>
+          <a:xfrm>
+            <a:off x="8763965" y="91440"/>
+            <a:ext cx="2842514" cy="274320"/>
+          </a:xfrm>
+          <a:prstGeom prst="rect">
+            <a:avLst/>
+          </a:prstGeom>
+          <a:noFill/>
+          <a:ln/>
+        </p:spPr>
+        <p:txBody>
+          <a:bodyPr wrap="square" lIns="0" tIns="0" rIns="0" bIns="0" rtlCol="0" anchor="ctr"/>
+          <a:lstStyle/>
+          <a:p>
+            <a:pPr indent="0" marL="0">
+              <a:buNone/>
+            </a:pPr>
+            <a:r>
+              <a:rPr lang="en-US" sz="1100" b="1" dirty="0">
+                <a:solidFill>
+                  <a:srgbClr val="075985"/>
+                </a:solidFill>
+                <a:latin typeface="Calibri" pitchFamily="34" charset="0"/>
+                <a:ea typeface="Calibri" pitchFamily="34" charset="-122"/>
+                <a:cs typeface="Calibri" pitchFamily="34" charset="-120"/>
+              </a:rPr>
+              <a:t>DA COMPRENDERE OGGI</a:t>
+            </a:r>
+            <a:pPr indent="0" marL="0">
+              <a:buNone/>
+            </a:pPr>
+            <a:r>
+              <a:rPr lang="en-US" sz="1100" dirty="0">
+                <a:solidFill>
+                  <a:srgbClr val="075985"/>
+                </a:solidFill>
+                <a:latin typeface="Calibri" pitchFamily="34" charset="0"/>
+                <a:ea typeface="Calibri" pitchFamily="34" charset="-122"/>
+                <a:cs typeface="Calibri" pitchFamily="34" charset="-120"/>
+              </a:rPr>
+              <a:t> · le porte CMOS</a:t>
+            </a:r>
+            <a:endParaRPr lang="en-US" sz="1100" dirty="0"/>
+          </a:p>
+        </p:txBody>
+      </p:sp>
       <p:pic>
         <p:nvPicPr>
-          <p:cNvPr id="9" name="Image 1" descr="preencoded.png">    </p:cNvPr>
+          <p:cNvPr id="12" name="Image 1" descr="preencoded.png">    </p:cNvPr>
           <p:cNvPicPr>
             <a:picLocks noChangeAspect="1"/>
           </p:cNvPicPr>
@@ -5986,6 +6901,30 @@
         </p:blipFill>
         <p:spPr>
           <a:xfrm>
+            <a:off x="1447926" y="1874520"/>
+            <a:ext cx="3565756" cy="3383280"/>
+          </a:xfrm>
+          <a:prstGeom prst="rect">
+            <a:avLst/>
+          </a:prstGeom>
+        </p:spPr>
+      </p:pic>
+      <p:pic>
+        <p:nvPicPr>
+          <p:cNvPr id="13" name="Image 2" descr="preencoded.png">    </p:cNvPr>
+          <p:cNvPicPr>
+            <a:picLocks noChangeAspect="1"/>
+          </p:cNvPicPr>
+          <p:nvPr/>
+        </p:nvPicPr>
+        <p:blipFill>
+          <a:blip r:embed="rId3"/>
+          <a:stretch>
+            <a:fillRect/>
+          </a:stretch>
+        </p:blipFill>
+        <p:spPr>
+          <a:xfrm>
             <a:off x="7178014" y="1874520"/>
             <a:ext cx="3565756" cy="3383280"/>
           </a:xfrm>
@@ -5996,7 +6935,7 @@
       </p:pic>
       <p:sp>
         <p:nvSpPr>
-          <p:cNvPr id="10" name="Shape 5"/>
+          <p:cNvPr id="14" name="Shape 8"/>
           <p:cNvSpPr/>
           <p:nvPr/>
         </p:nvSpPr>
@@ -6021,7 +6960,7 @@
       </p:sp>
       <p:sp>
         <p:nvSpPr>
-          <p:cNvPr id="11" name="Text 6"/>
+          <p:cNvPr id="15" name="Text 9"/>
           <p:cNvSpPr txBox="1"/>
           <p:nvPr/>
         </p:nvSpPr>
@@ -6063,7 +7002,7 @@
       </p:sp>
       <p:sp>
         <p:nvSpPr>
-          <p:cNvPr id="12" name="Shape 7"/>
+          <p:cNvPr id="16" name="Shape 10"/>
           <p:cNvSpPr/>
           <p:nvPr/>
         </p:nvSpPr>
@@ -6088,7 +7027,7 @@
       </p:sp>
       <p:sp>
         <p:nvSpPr>
-          <p:cNvPr id="13" name="Text 8"/>
+          <p:cNvPr id="17" name="Text 11"/>
           <p:cNvSpPr txBox="1"/>
           <p:nvPr/>
         </p:nvSpPr>
@@ -7962,6 +8901,133 @@
       </p:sp>
       <p:sp>
         <p:nvSpPr>
+          <p:cNvPr id="5" name="Shape 2"/>
+          <p:cNvSpPr/>
+          <p:nvPr/>
+        </p:nvSpPr>
+        <p:spPr>
+          <a:xfrm>
+            <a:off x="8379917" y="91440"/>
+            <a:ext cx="3263138" cy="274320"/>
+          </a:xfrm>
+          <a:prstGeom prst="rect">
+            <a:avLst/>
+          </a:prstGeom>
+          <a:solidFill>
+            <a:srgbClr val="E0F2FE"/>
+          </a:solidFill>
+          <a:ln w="12700">
+            <a:solidFill>
+              <a:srgbClr val="0369A1"/>
+            </a:solidFill>
+            <a:prstDash val="solid"/>
+          </a:ln>
+        </p:spPr>
+      </p:sp>
+      <p:sp>
+        <p:nvSpPr>
+          <p:cNvPr id="6" name="Shape 3"/>
+          <p:cNvSpPr/>
+          <p:nvPr/>
+        </p:nvSpPr>
+        <p:spPr>
+          <a:xfrm>
+            <a:off x="8379917" y="91440"/>
+            <a:ext cx="73152" cy="274320"/>
+          </a:xfrm>
+          <a:prstGeom prst="rect">
+            <a:avLst/>
+          </a:prstGeom>
+          <a:solidFill>
+            <a:srgbClr val="0369A1"/>
+          </a:solidFill>
+          <a:ln w="12700">
+            <a:solidFill>
+              <a:srgbClr val="0369A1"/>
+            </a:solidFill>
+            <a:prstDash val="solid"/>
+          </a:ln>
+        </p:spPr>
+      </p:sp>
+      <p:pic>
+        <p:nvPicPr>
+          <p:cNvPr id="7" name="Image 0" descr="preencoded.png">    </p:cNvPr>
+          <p:cNvPicPr>
+            <a:picLocks noChangeAspect="1"/>
+          </p:cNvPicPr>
+          <p:nvPr/>
+        </p:nvPicPr>
+        <p:blipFill>
+          <a:blip r:embed="rId1"/>
+          <a:stretch>
+            <a:fillRect/>
+          </a:stretch>
+        </p:blipFill>
+        <p:spPr>
+          <a:xfrm>
+            <a:off x="8507933" y="128016"/>
+            <a:ext cx="201168" cy="201168"/>
+          </a:xfrm>
+          <a:prstGeom prst="rect">
+            <a:avLst/>
+          </a:prstGeom>
+        </p:spPr>
+      </p:pic>
+      <p:sp>
+        <p:nvSpPr>
+          <p:cNvPr id="8" name="Text 4"/>
+          <p:cNvSpPr txBox="1"/>
+          <p:nvPr/>
+        </p:nvSpPr>
+        <p:spPr>
+          <a:xfrm>
+            <a:off x="8763965" y="91440"/>
+            <a:ext cx="2842514" cy="274320"/>
+          </a:xfrm>
+          <a:prstGeom prst="rect">
+            <a:avLst/>
+          </a:prstGeom>
+          <a:noFill/>
+          <a:ln/>
+        </p:spPr>
+        <p:txBody>
+          <a:bodyPr wrap="square" lIns="0" tIns="0" rIns="0" bIns="0" rtlCol="0" anchor="ctr"/>
+          <a:lstStyle/>
+          <a:p>
+            <a:pPr indent="0" marL="0">
+              <a:buNone/>
+            </a:pPr>
+            <a:r>
+              <a:rPr lang="en-US" sz="1100" b="1" dirty="0">
+                <a:solidFill>
+                  <a:srgbClr val="075985"/>
+                </a:solidFill>
+                <a:latin typeface="Calibri" pitchFamily="34" charset="0"/>
+                <a:ea typeface="Calibri" pitchFamily="34" charset="-122"/>
+                <a:cs typeface="Calibri" pitchFamily="34" charset="-120"/>
+              </a:rPr>
+              <a:t>DA COMPRENDERE OGGI</a:t>
+            </a:r>
+            <a:pPr indent="0" marL="0">
+              <a:buNone/>
+            </a:pPr>
+            <a:r>
+              <a:rPr lang="en-US" sz="1100" dirty="0">
+                <a:solidFill>
+                  <a:srgbClr val="075985"/>
+                </a:solidFill>
+                <a:latin typeface="Calibri" pitchFamily="34" charset="0"/>
+                <a:ea typeface="Calibri" pitchFamily="34" charset="-122"/>
+                <a:cs typeface="Calibri" pitchFamily="34" charset="-120"/>
+              </a:rPr>
+              <a:t> · le porte CMOS</a:t>
+            </a:r>
+            <a:endParaRPr lang="en-US" sz="1100" dirty="0"/>
+          </a:p>
+        </p:txBody>
+      </p:sp>
+      <p:sp>
+        <p:nvSpPr>
           <p:cNvPr id="25" name="Slide Number Placeholder 0"/>
           <p:cNvSpPr>
             <a:spLocks noGrp="1"/>
@@ -8536,6 +9602,324 @@
       </p:sp>
       <p:sp>
         <p:nvSpPr>
+          <p:cNvPr id="16" name="Shape 14"/>
+          <p:cNvSpPr/>
+          <p:nvPr/>
+        </p:nvSpPr>
+        <p:spPr>
+          <a:xfrm>
+            <a:off x="7225995" y="91440"/>
+            <a:ext cx="4417060" cy="274320"/>
+          </a:xfrm>
+          <a:prstGeom prst="rect">
+            <a:avLst/>
+          </a:prstGeom>
+          <a:solidFill>
+            <a:srgbClr val="F3E8FF"/>
+          </a:solidFill>
+          <a:ln w="12700">
+            <a:solidFill>
+              <a:srgbClr val="7E22CE"/>
+            </a:solidFill>
+            <a:prstDash val="dash"/>
+          </a:ln>
+        </p:spPr>
+      </p:sp>
+      <p:sp>
+        <p:nvSpPr>
+          <p:cNvPr id="17" name="Shape 15"/>
+          <p:cNvSpPr/>
+          <p:nvPr/>
+        </p:nvSpPr>
+        <p:spPr>
+          <a:xfrm>
+            <a:off x="7253427" y="128016"/>
+            <a:ext cx="45720" cy="45720"/>
+          </a:xfrm>
+          <a:prstGeom prst="rect">
+            <a:avLst/>
+          </a:prstGeom>
+          <a:solidFill>
+            <a:srgbClr val="7E22CE"/>
+          </a:solidFill>
+          <a:ln w="12700">
+            <a:solidFill>
+              <a:srgbClr val="7E22CE"/>
+            </a:solidFill>
+            <a:prstDash val="solid"/>
+          </a:ln>
+        </p:spPr>
+      </p:sp>
+      <p:sp>
+        <p:nvSpPr>
+          <p:cNvPr id="18" name="Shape 16"/>
+          <p:cNvSpPr/>
+          <p:nvPr/>
+        </p:nvSpPr>
+        <p:spPr>
+          <a:xfrm>
+            <a:off x="7253427" y="205740"/>
+            <a:ext cx="45720" cy="45720"/>
+          </a:xfrm>
+          <a:prstGeom prst="rect">
+            <a:avLst/>
+          </a:prstGeom>
+          <a:solidFill>
+            <a:srgbClr val="7E22CE"/>
+          </a:solidFill>
+          <a:ln w="12700">
+            <a:solidFill>
+              <a:srgbClr val="7E22CE"/>
+            </a:solidFill>
+            <a:prstDash val="solid"/>
+          </a:ln>
+        </p:spPr>
+      </p:sp>
+      <p:sp>
+        <p:nvSpPr>
+          <p:cNvPr id="19" name="Shape 17"/>
+          <p:cNvSpPr/>
+          <p:nvPr/>
+        </p:nvSpPr>
+        <p:spPr>
+          <a:xfrm>
+            <a:off x="7253427" y="283464"/>
+            <a:ext cx="45720" cy="45720"/>
+          </a:xfrm>
+          <a:prstGeom prst="rect">
+            <a:avLst/>
+          </a:prstGeom>
+          <a:solidFill>
+            <a:srgbClr val="7E22CE"/>
+          </a:solidFill>
+          <a:ln w="12700">
+            <a:solidFill>
+              <a:srgbClr val="7E22CE"/>
+            </a:solidFill>
+            <a:prstDash val="solid"/>
+          </a:ln>
+        </p:spPr>
+      </p:sp>
+      <p:pic>
+        <p:nvPicPr>
+          <p:cNvPr id="20" name="Image 0" descr="preencoded.png">    </p:cNvPr>
+          <p:cNvPicPr>
+            <a:picLocks noChangeAspect="1"/>
+          </p:cNvPicPr>
+          <p:nvPr/>
+        </p:nvPicPr>
+        <p:blipFill>
+          <a:blip r:embed="rId1"/>
+          <a:stretch>
+            <a:fillRect/>
+          </a:stretch>
+        </p:blipFill>
+        <p:spPr>
+          <a:xfrm>
+            <a:off x="7354011" y="128016"/>
+            <a:ext cx="201168" cy="201168"/>
+          </a:xfrm>
+          <a:prstGeom prst="rect">
+            <a:avLst/>
+          </a:prstGeom>
+        </p:spPr>
+      </p:pic>
+      <p:sp>
+        <p:nvSpPr>
+          <p:cNvPr id="21" name="Text 18"/>
+          <p:cNvSpPr txBox="1"/>
+          <p:nvPr/>
+        </p:nvSpPr>
+        <p:spPr>
+          <a:xfrm>
+            <a:off x="7610043" y="91440"/>
+            <a:ext cx="3996436" cy="274320"/>
+          </a:xfrm>
+          <a:prstGeom prst="rect">
+            <a:avLst/>
+          </a:prstGeom>
+          <a:noFill/>
+          <a:ln/>
+        </p:spPr>
+        <p:txBody>
+          <a:bodyPr wrap="square" lIns="0" tIns="0" rIns="0" bIns="0" rtlCol="0" anchor="ctr"/>
+          <a:lstStyle/>
+          <a:p>
+            <a:pPr indent="0" marL="0">
+              <a:buNone/>
+            </a:pPr>
+            <a:r>
+              <a:rPr lang="en-US" sz="1100" b="1" dirty="0">
+                <a:solidFill>
+                  <a:srgbClr val="6B21A8"/>
+                </a:solidFill>
+                <a:latin typeface="Calibri" pitchFamily="34" charset="0"/>
+                <a:ea typeface="Calibri" pitchFamily="34" charset="-122"/>
+                <a:cs typeface="Calibri" pitchFamily="34" charset="-120"/>
+              </a:rPr>
+              <a:t>DA COMPRENDERE PIÙ AVANTI</a:t>
+            </a:r>
+            <a:pPr indent="0" marL="0">
+              <a:buNone/>
+            </a:pPr>
+            <a:r>
+              <a:rPr lang="en-US" sz="1100" dirty="0">
+                <a:solidFill>
+                  <a:srgbClr val="6B21A8"/>
+                </a:solidFill>
+                <a:latin typeface="Calibri" pitchFamily="34" charset="0"/>
+                <a:ea typeface="Calibri" pitchFamily="34" charset="-122"/>
+                <a:cs typeface="Calibri" pitchFamily="34" charset="-120"/>
+              </a:rPr>
+              <a:t> · il clock</a:t>
+            </a:r>
+            <a:pPr indent="0" marL="0">
+              <a:buNone/>
+            </a:pPr>
+            <a:r>
+              <a:rPr lang="en-US" sz="1100" b="1" dirty="0">
+                <a:solidFill>
+                  <a:srgbClr val="6B21A8"/>
+                </a:solidFill>
+                <a:latin typeface="Calibri" pitchFamily="34" charset="0"/>
+                <a:ea typeface="Calibri" pitchFamily="34" charset="-122"/>
+                <a:cs typeface="Calibri" pitchFamily="34" charset="-120"/>
+              </a:rPr>
+              <a:t> → Lezione 13</a:t>
+            </a:r>
+            <a:endParaRPr lang="en-US" sz="1100" dirty="0"/>
+          </a:p>
+        </p:txBody>
+      </p:sp>
+      <p:sp>
+        <p:nvSpPr>
+          <p:cNvPr id="22" name="Shape 19"/>
+          <p:cNvSpPr/>
+          <p:nvPr/>
+        </p:nvSpPr>
+        <p:spPr>
+          <a:xfrm>
+            <a:off x="3853129" y="91440"/>
+            <a:ext cx="3263138" cy="274320"/>
+          </a:xfrm>
+          <a:prstGeom prst="rect">
+            <a:avLst/>
+          </a:prstGeom>
+          <a:solidFill>
+            <a:srgbClr val="E0F2FE"/>
+          </a:solidFill>
+          <a:ln w="12700">
+            <a:solidFill>
+              <a:srgbClr val="0369A1"/>
+            </a:solidFill>
+            <a:prstDash val="solid"/>
+          </a:ln>
+        </p:spPr>
+      </p:sp>
+      <p:sp>
+        <p:nvSpPr>
+          <p:cNvPr id="23" name="Shape 20"/>
+          <p:cNvSpPr/>
+          <p:nvPr/>
+        </p:nvSpPr>
+        <p:spPr>
+          <a:xfrm>
+            <a:off x="3853129" y="91440"/>
+            <a:ext cx="73152" cy="274320"/>
+          </a:xfrm>
+          <a:prstGeom prst="rect">
+            <a:avLst/>
+          </a:prstGeom>
+          <a:solidFill>
+            <a:srgbClr val="0369A1"/>
+          </a:solidFill>
+          <a:ln w="12700">
+            <a:solidFill>
+              <a:srgbClr val="0369A1"/>
+            </a:solidFill>
+            <a:prstDash val="solid"/>
+          </a:ln>
+        </p:spPr>
+      </p:sp>
+      <p:pic>
+        <p:nvPicPr>
+          <p:cNvPr id="24" name="Image 1" descr="preencoded.png">    </p:cNvPr>
+          <p:cNvPicPr>
+            <a:picLocks noChangeAspect="1"/>
+          </p:cNvPicPr>
+          <p:nvPr/>
+        </p:nvPicPr>
+        <p:blipFill>
+          <a:blip r:embed="rId2"/>
+          <a:stretch>
+            <a:fillRect/>
+          </a:stretch>
+        </p:blipFill>
+        <p:spPr>
+          <a:xfrm>
+            <a:off x="3981145" y="128016"/>
+            <a:ext cx="201168" cy="201168"/>
+          </a:xfrm>
+          <a:prstGeom prst="rect">
+            <a:avLst/>
+          </a:prstGeom>
+        </p:spPr>
+      </p:pic>
+      <p:sp>
+        <p:nvSpPr>
+          <p:cNvPr id="25" name="Text 21"/>
+          <p:cNvSpPr txBox="1"/>
+          <p:nvPr/>
+        </p:nvSpPr>
+        <p:spPr>
+          <a:xfrm>
+            <a:off x="4237177" y="91440"/>
+            <a:ext cx="2842514" cy="274320"/>
+          </a:xfrm>
+          <a:prstGeom prst="rect">
+            <a:avLst/>
+          </a:prstGeom>
+          <a:noFill/>
+          <a:ln/>
+        </p:spPr>
+        <p:txBody>
+          <a:bodyPr wrap="square" lIns="0" tIns="0" rIns="0" bIns="0" rtlCol="0" anchor="ctr"/>
+          <a:lstStyle/>
+          <a:p>
+            <a:pPr indent="0" marL="0">
+              <a:buNone/>
+            </a:pPr>
+            <a:r>
+              <a:rPr lang="en-US" sz="1100" b="1" dirty="0">
+                <a:solidFill>
+                  <a:srgbClr val="075985"/>
+                </a:solidFill>
+                <a:latin typeface="Calibri" pitchFamily="34" charset="0"/>
+                <a:ea typeface="Calibri" pitchFamily="34" charset="-122"/>
+                <a:cs typeface="Calibri" pitchFamily="34" charset="-120"/>
+              </a:rPr>
+              <a:t>DA COMPRENDERE OGGI</a:t>
+            </a:r>
+            <a:pPr indent="0" marL="0">
+              <a:buNone/>
+            </a:pPr>
+            <a:r>
+              <a:rPr lang="en-US" sz="1100" dirty="0">
+                <a:solidFill>
+                  <a:srgbClr val="075985"/>
+                </a:solidFill>
+                <a:latin typeface="Calibri" pitchFamily="34" charset="0"/>
+                <a:ea typeface="Calibri" pitchFamily="34" charset="-122"/>
+                <a:cs typeface="Calibri" pitchFamily="34" charset="-120"/>
+              </a:rPr>
+              <a:t> · le porte CMOS</a:t>
+            </a:r>
+            <a:endParaRPr lang="en-US" sz="1100" dirty="0"/>
+          </a:p>
+        </p:txBody>
+      </p:sp>
+      <p:sp>
+        <p:nvSpPr>
           <p:cNvPr id="25" name="Slide Number Placeholder 0"/>
           <p:cNvSpPr>
             <a:spLocks noGrp="1"/>
@@ -8702,9 +10086,59 @@
           </a:ln>
         </p:spPr>
       </p:sp>
+      <p:sp>
+        <p:nvSpPr>
+          <p:cNvPr id="5" name="Shape 3"/>
+          <p:cNvSpPr/>
+          <p:nvPr/>
+        </p:nvSpPr>
+        <p:spPr>
+          <a:xfrm>
+            <a:off x="7657668" y="91440"/>
+            <a:ext cx="3985387" cy="274320"/>
+          </a:xfrm>
+          <a:prstGeom prst="rect">
+            <a:avLst/>
+          </a:prstGeom>
+          <a:solidFill>
+            <a:srgbClr val="E0F2FE"/>
+          </a:solidFill>
+          <a:ln w="12700">
+            <a:solidFill>
+              <a:srgbClr val="0369A1"/>
+            </a:solidFill>
+            <a:prstDash val="solid"/>
+          </a:ln>
+        </p:spPr>
+      </p:sp>
+      <p:sp>
+        <p:nvSpPr>
+          <p:cNvPr id="6" name="Shape 4"/>
+          <p:cNvSpPr/>
+          <p:nvPr/>
+        </p:nvSpPr>
+        <p:spPr>
+          <a:xfrm>
+            <a:off x="7657668" y="91440"/>
+            <a:ext cx="73152" cy="274320"/>
+          </a:xfrm>
+          <a:prstGeom prst="rect">
+            <a:avLst/>
+          </a:prstGeom>
+          <a:solidFill>
+            <a:srgbClr val="0369A1"/>
+          </a:solidFill>
+          <a:ln w="12700">
+            <a:solidFill>
+              <a:srgbClr val="0369A1"/>
+            </a:solidFill>
+            <a:prstDash val="solid"/>
+          </a:ln>
+        </p:spPr>
+      </p:sp>
       <p:pic>
         <p:nvPicPr>
-          <p:cNvPr id="6" name="Image 0" descr="preencoded.png">    </p:cNvPr>
+          <p:cNvPr id="7" name="Image 0" descr="preencoded.png">    </p:cNvPr>
           <p:cNvPicPr>
             <a:picLocks noChangeAspect="1"/>
           </p:cNvPicPr>
@@ -8718,17 +10152,70 @@
         </p:blipFill>
         <p:spPr>
           <a:xfrm>
-            <a:off x="640080" y="2105753"/>
-            <a:ext cx="2560320" cy="3378014"/>
+            <a:off x="7785684" y="128016"/>
+            <a:ext cx="201168" cy="201168"/>
           </a:xfrm>
           <a:prstGeom prst="rect">
             <a:avLst/>
           </a:prstGeom>
         </p:spPr>
       </p:pic>
+      <p:sp>
+        <p:nvSpPr>
+          <p:cNvPr id="8" name="Text 5"/>
+          <p:cNvSpPr txBox="1"/>
+          <p:nvPr/>
+        </p:nvSpPr>
+        <p:spPr>
+          <a:xfrm>
+            <a:off x="8041716" y="91440"/>
+            <a:ext cx="3564763" cy="274320"/>
+          </a:xfrm>
+          <a:prstGeom prst="rect">
+            <a:avLst/>
+          </a:prstGeom>
+          <a:noFill/>
+          <a:ln/>
+        </p:spPr>
+        <p:txBody>
+          <a:bodyPr wrap="square" lIns="0" tIns="0" rIns="0" bIns="0" rtlCol="0" anchor="ctr"/>
+          <a:lstStyle/>
+          <a:p>
+            <a:pPr indent="0" marL="0">
+              <a:buNone/>
+            </a:pPr>
+            <a:r>
+              <a:rPr lang="en-US" sz="1100" b="1" dirty="0">
+                <a:solidFill>
+                  <a:srgbClr val="075985"/>
+                </a:solidFill>
+                <a:latin typeface="Calibri" pitchFamily="34" charset="0"/>
+                <a:ea typeface="Calibri" pitchFamily="34" charset="-122"/>
+                <a:cs typeface="Calibri" pitchFamily="34" charset="-120"/>
+              </a:rPr>
+              <a:t>DA COMPRENDERE OGGI</a:t>
+            </a:r>
+            <a:pPr indent="0" marL="0">
+              <a:buNone/>
+            </a:pPr>
+            <a:r>
+              <a:rPr lang="en-US" sz="1100" dirty="0">
+                <a:solidFill>
+                  <a:srgbClr val="075985"/>
+                </a:solidFill>
+                <a:latin typeface="Calibri" pitchFamily="34" charset="0"/>
+                <a:ea typeface="Calibri" pitchFamily="34" charset="-122"/>
+                <a:cs typeface="Calibri" pitchFamily="34" charset="-120"/>
+              </a:rPr>
+              <a:t> · gli ingressi con pull-up</a:t>
+            </a:r>
+            <a:endParaRPr lang="en-US" sz="1100" dirty="0"/>
+          </a:p>
+        </p:txBody>
+      </p:sp>
       <p:pic>
         <p:nvPicPr>
-          <p:cNvPr id="7" name="Image 1" descr="preencoded.png">    </p:cNvPr>
+          <p:cNvPr id="10" name="Image 1" descr="preencoded.png">    </p:cNvPr>
           <p:cNvPicPr>
             <a:picLocks noChangeAspect="1"/>
           </p:cNvPicPr>
@@ -8742,6 +10229,30 @@
         </p:blipFill>
         <p:spPr>
           <a:xfrm>
+            <a:off x="640080" y="2105753"/>
+            <a:ext cx="2560320" cy="3378014"/>
+          </a:xfrm>
+          <a:prstGeom prst="rect">
+            <a:avLst/>
+          </a:prstGeom>
+        </p:spPr>
+      </p:pic>
+      <p:pic>
+        <p:nvPicPr>
+          <p:cNvPr id="11" name="Image 2" descr="preencoded.png">    </p:cNvPr>
+          <p:cNvPicPr>
+            <a:picLocks noChangeAspect="1"/>
+          </p:cNvPicPr>
+          <p:nvPr/>
+        </p:nvPicPr>
+        <p:blipFill>
+          <a:blip r:embed="rId3"/>
+          <a:stretch>
+            <a:fillRect/>
+          </a:stretch>
+        </p:blipFill>
+        <p:spPr>
+          <a:xfrm>
             <a:off x="3611880" y="2105753"/>
             <a:ext cx="2560320" cy="3378014"/>
           </a:xfrm>
@@ -8752,7 +10263,7 @@
       </p:pic>
       <p:sp>
         <p:nvSpPr>
-          <p:cNvPr id="8" name="Shape 3"/>
+          <p:cNvPr id="12" name="Shape 6"/>
           <p:cNvSpPr/>
           <p:nvPr/>
         </p:nvSpPr>
@@ -8777,7 +10288,7 @@
       </p:sp>
       <p:sp>
         <p:nvSpPr>
-          <p:cNvPr id="9" name="Text 4"/>
+          <p:cNvPr id="13" name="Text 7"/>
           <p:cNvSpPr txBox="1"/>
           <p:nvPr/>
         </p:nvSpPr>
@@ -8819,7 +10330,7 @@
       </p:sp>
       <p:sp>
         <p:nvSpPr>
-          <p:cNvPr id="10" name="Shape 5"/>
+          <p:cNvPr id="14" name="Shape 8"/>
           <p:cNvSpPr/>
           <p:nvPr/>
         </p:nvSpPr>
@@ -8844,7 +10355,7 @@
       </p:sp>
       <p:sp>
         <p:nvSpPr>
-          <p:cNvPr id="11" name="Text 6"/>
+          <p:cNvPr id="15" name="Text 9"/>
           <p:cNvSpPr txBox="1"/>
           <p:nvPr/>
         </p:nvSpPr>
@@ -8886,7 +10397,7 @@
       </p:sp>
       <p:sp>
         <p:nvSpPr>
-          <p:cNvPr id="12" name="Shape 7"/>
+          <p:cNvPr id="16" name="Shape 10"/>
           <p:cNvSpPr/>
           <p:nvPr/>
         </p:nvSpPr>
@@ -8911,7 +10422,7 @@
       </p:sp>
       <p:sp>
         <p:nvSpPr>
-          <p:cNvPr id="13" name="Text 8"/>
+          <p:cNvPr id="17" name="Text 11"/>
           <p:cNvSpPr txBox="1"/>
           <p:nvPr/>
         </p:nvSpPr>
@@ -8973,7 +10484,7 @@
       </p:sp>
       <p:sp>
         <p:nvSpPr>
-          <p:cNvPr id="14" name="Shape 9"/>
+          <p:cNvPr id="18" name="Shape 12"/>
           <p:cNvSpPr/>
           <p:nvPr/>
         </p:nvSpPr>
@@ -8998,7 +10509,7 @@
       </p:sp>
       <p:sp>
         <p:nvSpPr>
-          <p:cNvPr id="15" name="Text 10"/>
+          <p:cNvPr id="19" name="Text 13"/>
           <p:cNvSpPr txBox="1"/>
           <p:nvPr/>
         </p:nvSpPr>
@@ -9040,7 +10551,7 @@
       </p:sp>
       <p:sp>
         <p:nvSpPr>
-          <p:cNvPr id="16" name="Shape 11"/>
+          <p:cNvPr id="20" name="Shape 14"/>
           <p:cNvSpPr/>
           <p:nvPr/>
         </p:nvSpPr>
@@ -9065,7 +10576,7 @@
       </p:sp>
       <p:sp>
         <p:nvSpPr>
-          <p:cNvPr id="17" name="Text 12"/>
+          <p:cNvPr id="21" name="Text 15"/>
           <p:cNvSpPr txBox="1"/>
           <p:nvPr/>
         </p:nvSpPr>
@@ -16604,6 +18115,133 @@
       </p:sp>
       <p:sp>
         <p:nvSpPr>
+          <p:cNvPr id="5" name="Shape 2"/>
+          <p:cNvSpPr/>
+          <p:nvPr/>
+        </p:nvSpPr>
+        <p:spPr>
+          <a:xfrm>
+            <a:off x="7132396" y="91440"/>
+            <a:ext cx="4510659" cy="274320"/>
+          </a:xfrm>
+          <a:prstGeom prst="rect">
+            <a:avLst/>
+          </a:prstGeom>
+          <a:solidFill>
+            <a:srgbClr val="E0F2FE"/>
+          </a:solidFill>
+          <a:ln w="12700">
+            <a:solidFill>
+              <a:srgbClr val="0369A1"/>
+            </a:solidFill>
+            <a:prstDash val="solid"/>
+          </a:ln>
+        </p:spPr>
+      </p:sp>
+      <p:sp>
+        <p:nvSpPr>
+          <p:cNvPr id="6" name="Shape 3"/>
+          <p:cNvSpPr/>
+          <p:nvPr/>
+        </p:nvSpPr>
+        <p:spPr>
+          <a:xfrm>
+            <a:off x="7132396" y="91440"/>
+            <a:ext cx="73152" cy="274320"/>
+          </a:xfrm>
+          <a:prstGeom prst="rect">
+            <a:avLst/>
+          </a:prstGeom>
+          <a:solidFill>
+            <a:srgbClr val="0369A1"/>
+          </a:solidFill>
+          <a:ln w="12700">
+            <a:solidFill>
+              <a:srgbClr val="0369A1"/>
+            </a:solidFill>
+            <a:prstDash val="solid"/>
+          </a:ln>
+        </p:spPr>
+      </p:sp>
+      <p:pic>
+        <p:nvPicPr>
+          <p:cNvPr id="7" name="Image 0" descr="preencoded.png">    </p:cNvPr>
+          <p:cNvPicPr>
+            <a:picLocks noChangeAspect="1"/>
+          </p:cNvPicPr>
+          <p:nvPr/>
+        </p:nvPicPr>
+        <p:blipFill>
+          <a:blip r:embed="rId1"/>
+          <a:stretch>
+            <a:fillRect/>
+          </a:stretch>
+        </p:blipFill>
+        <p:spPr>
+          <a:xfrm>
+            <a:off x="7260412" y="128016"/>
+            <a:ext cx="201168" cy="201168"/>
+          </a:xfrm>
+          <a:prstGeom prst="rect">
+            <a:avLst/>
+          </a:prstGeom>
+        </p:spPr>
+      </p:pic>
+      <p:sp>
+        <p:nvSpPr>
+          <p:cNvPr id="8" name="Text 4"/>
+          <p:cNvSpPr txBox="1"/>
+          <p:nvPr/>
+        </p:nvSpPr>
+        <p:spPr>
+          <a:xfrm>
+            <a:off x="7516444" y="91440"/>
+            <a:ext cx="4090035" cy="274320"/>
+          </a:xfrm>
+          <a:prstGeom prst="rect">
+            <a:avLst/>
+          </a:prstGeom>
+          <a:noFill/>
+          <a:ln/>
+        </p:spPr>
+        <p:txBody>
+          <a:bodyPr wrap="square" lIns="0" tIns="0" rIns="0" bIns="0" rtlCol="0" anchor="ctr"/>
+          <a:lstStyle/>
+          <a:p>
+            <a:pPr indent="0" marL="0">
+              <a:buNone/>
+            </a:pPr>
+            <a:r>
+              <a:rPr lang="en-US" sz="1100" b="1" dirty="0">
+                <a:solidFill>
+                  <a:srgbClr val="075985"/>
+                </a:solidFill>
+                <a:latin typeface="Calibri" pitchFamily="34" charset="0"/>
+                <a:ea typeface="Calibri" pitchFamily="34" charset="-122"/>
+                <a:cs typeface="Calibri" pitchFamily="34" charset="-120"/>
+              </a:rPr>
+              <a:t>DA COMPRENDERE OGGI</a:t>
+            </a:r>
+            <a:pPr indent="0" marL="0">
+              <a:buNone/>
+            </a:pPr>
+            <a:r>
+              <a:rPr lang="en-US" sz="1100" dirty="0">
+                <a:solidFill>
+                  <a:srgbClr val="075985"/>
+                </a:solidFill>
+                <a:latin typeface="Calibri" pitchFamily="34" charset="0"/>
+                <a:ea typeface="Calibri" pitchFamily="34" charset="-122"/>
+                <a:cs typeface="Calibri" pitchFamily="34" charset="-120"/>
+              </a:rPr>
+              <a:t> · tensione, corrente, legge di Ohm</a:t>
+            </a:r>
+            <a:endParaRPr lang="en-US" sz="1100" dirty="0"/>
+          </a:p>
+        </p:txBody>
+      </p:sp>
+      <p:sp>
+        <p:nvSpPr>
           <p:cNvPr id="25" name="Slide Number Placeholder 0"/>
           <p:cNvSpPr>
             <a:spLocks noGrp="1"/>
@@ -16743,9 +18381,59 @@
           </a:ln>
         </p:spPr>
       </p:sp>
+      <p:sp>
+        <p:nvSpPr>
+          <p:cNvPr id="4" name="Shape 2"/>
+          <p:cNvSpPr/>
+          <p:nvPr/>
+        </p:nvSpPr>
+        <p:spPr>
+          <a:xfrm>
+            <a:off x="7132396" y="91440"/>
+            <a:ext cx="4510659" cy="274320"/>
+          </a:xfrm>
+          <a:prstGeom prst="rect">
+            <a:avLst/>
+          </a:prstGeom>
+          <a:solidFill>
+            <a:srgbClr val="E0F2FE"/>
+          </a:solidFill>
+          <a:ln w="12700">
+            <a:solidFill>
+              <a:srgbClr val="0369A1"/>
+            </a:solidFill>
+            <a:prstDash val="solid"/>
+          </a:ln>
+        </p:spPr>
+      </p:sp>
+      <p:sp>
+        <p:nvSpPr>
+          <p:cNvPr id="5" name="Shape 3"/>
+          <p:cNvSpPr/>
+          <p:nvPr/>
+        </p:nvSpPr>
+        <p:spPr>
+          <a:xfrm>
+            <a:off x="7132396" y="91440"/>
+            <a:ext cx="73152" cy="274320"/>
+          </a:xfrm>
+          <a:prstGeom prst="rect">
+            <a:avLst/>
+          </a:prstGeom>
+          <a:solidFill>
+            <a:srgbClr val="0369A1"/>
+          </a:solidFill>
+          <a:ln w="12700">
+            <a:solidFill>
+              <a:srgbClr val="0369A1"/>
+            </a:solidFill>
+            <a:prstDash val="solid"/>
+          </a:ln>
+        </p:spPr>
+      </p:sp>
       <p:pic>
         <p:nvPicPr>
-          <p:cNvPr id="5" name="Image 0" descr="preencoded.png">    </p:cNvPr>
+          <p:cNvPr id="6" name="Image 0" descr="preencoded.png">    </p:cNvPr>
           <p:cNvPicPr>
             <a:picLocks noChangeAspect="1"/>
           </p:cNvPicPr>
@@ -16759,6 +18447,83 @@
         </p:blipFill>
         <p:spPr>
           <a:xfrm>
+            <a:off x="7260412" y="128016"/>
+            <a:ext cx="201168" cy="201168"/>
+          </a:xfrm>
+          <a:prstGeom prst="rect">
+            <a:avLst/>
+          </a:prstGeom>
+        </p:spPr>
+      </p:pic>
+      <p:sp>
+        <p:nvSpPr>
+          <p:cNvPr id="7" name="Text 4"/>
+          <p:cNvSpPr txBox="1"/>
+          <p:nvPr/>
+        </p:nvSpPr>
+        <p:spPr>
+          <a:xfrm>
+            <a:off x="7516444" y="91440"/>
+            <a:ext cx="4090035" cy="274320"/>
+          </a:xfrm>
+          <a:prstGeom prst="rect">
+            <a:avLst/>
+          </a:prstGeom>
+          <a:noFill/>
+          <a:ln/>
+        </p:spPr>
+        <p:txBody>
+          <a:bodyPr wrap="square" lIns="0" tIns="0" rIns="0" bIns="0" rtlCol="0" anchor="ctr"/>
+          <a:lstStyle/>
+          <a:p>
+            <a:pPr indent="0" marL="0">
+              <a:buNone/>
+            </a:pPr>
+            <a:r>
+              <a:rPr lang="en-US" sz="1100" b="1" dirty="0">
+                <a:solidFill>
+                  <a:srgbClr val="075985"/>
+                </a:solidFill>
+                <a:latin typeface="Calibri" pitchFamily="34" charset="0"/>
+                <a:ea typeface="Calibri" pitchFamily="34" charset="-122"/>
+                <a:cs typeface="Calibri" pitchFamily="34" charset="-120"/>
+              </a:rPr>
+              <a:t>DA COMPRENDERE OGGI</a:t>
+            </a:r>
+            <a:pPr indent="0" marL="0">
+              <a:buNone/>
+            </a:pPr>
+            <a:r>
+              <a:rPr lang="en-US" sz="1100" dirty="0">
+                <a:solidFill>
+                  <a:srgbClr val="075985"/>
+                </a:solidFill>
+                <a:latin typeface="Calibri" pitchFamily="34" charset="0"/>
+                <a:ea typeface="Calibri" pitchFamily="34" charset="-122"/>
+                <a:cs typeface="Calibri" pitchFamily="34" charset="-120"/>
+              </a:rPr>
+              <a:t> · tensione, corrente, legge di Ohm</a:t>
+            </a:r>
+            <a:endParaRPr lang="en-US" sz="1100" dirty="0"/>
+          </a:p>
+        </p:txBody>
+      </p:sp>
+      <p:pic>
+        <p:nvPicPr>
+          <p:cNvPr id="9" name="Image 1" descr="preencoded.png">    </p:cNvPr>
+          <p:cNvPicPr>
+            <a:picLocks noChangeAspect="1"/>
+          </p:cNvPicPr>
+          <p:nvPr/>
+        </p:nvPicPr>
+        <p:blipFill>
+          <a:blip r:embed="rId2"/>
+          <a:stretch>
+            <a:fillRect/>
+          </a:stretch>
+        </p:blipFill>
+        <p:spPr>
+          <a:xfrm>
             <a:off x="731520" y="2193978"/>
             <a:ext cx="3840480" cy="3201564"/>
           </a:xfrm>
@@ -16769,7 +18534,7 @@
       </p:pic>
       <p:sp>
         <p:nvSpPr>
-          <p:cNvPr id="6" name="Text 2"/>
+          <p:cNvPr id="10" name="Text 5"/>
           <p:cNvSpPr txBox="1"/>
           <p:nvPr/>
         </p:nvSpPr>
@@ -16808,7 +18573,7 @@
       </p:sp>
       <p:sp>
         <p:nvSpPr>
-          <p:cNvPr id="7" name="Shape 3"/>
+          <p:cNvPr id="11" name="Shape 6"/>
           <p:cNvSpPr/>
           <p:nvPr/>
         </p:nvSpPr>
@@ -16833,7 +18598,7 @@
       </p:sp>
       <p:sp>
         <p:nvSpPr>
-          <p:cNvPr id="8" name="Text 4"/>
+          <p:cNvPr id="12" name="Text 7"/>
           <p:cNvSpPr txBox="1"/>
           <p:nvPr/>
         </p:nvSpPr>
@@ -16875,7 +18640,7 @@
       </p:sp>
       <p:sp>
         <p:nvSpPr>
-          <p:cNvPr id="9" name="Shape 5"/>
+          <p:cNvPr id="13" name="Shape 8"/>
           <p:cNvSpPr/>
           <p:nvPr/>
         </p:nvSpPr>
@@ -16900,7 +18665,7 @@
       </p:sp>
       <p:sp>
         <p:nvSpPr>
-          <p:cNvPr id="10" name="Text 6"/>
+          <p:cNvPr id="14" name="Text 9"/>
           <p:cNvSpPr txBox="1"/>
           <p:nvPr/>
         </p:nvSpPr>
@@ -16942,7 +18707,7 @@
       </p:sp>
       <p:sp>
         <p:nvSpPr>
-          <p:cNvPr id="11" name="Shape 7"/>
+          <p:cNvPr id="15" name="Shape 10"/>
           <p:cNvSpPr/>
           <p:nvPr/>
         </p:nvSpPr>
@@ -16967,7 +18732,7 @@
       </p:sp>
       <p:sp>
         <p:nvSpPr>
-          <p:cNvPr id="12" name="Text 8"/>
+          <p:cNvPr id="16" name="Text 11"/>
           <p:cNvSpPr txBox="1"/>
           <p:nvPr/>
         </p:nvSpPr>
@@ -17009,7 +18774,7 @@
       </p:sp>
       <p:sp>
         <p:nvSpPr>
-          <p:cNvPr id="13" name="Shape 9"/>
+          <p:cNvPr id="17" name="Shape 12"/>
           <p:cNvSpPr/>
           <p:nvPr/>
         </p:nvSpPr>
@@ -17034,7 +18799,7 @@
       </p:sp>
       <p:sp>
         <p:nvSpPr>
-          <p:cNvPr id="14" name="Text 10"/>
+          <p:cNvPr id="18" name="Text 13"/>
           <p:cNvSpPr txBox="1"/>
           <p:nvPr/>
         </p:nvSpPr>
@@ -17630,9 +19395,59 @@
           </a:ln>
         </p:spPr>
       </p:sp>
+      <p:sp>
+        <p:nvSpPr>
+          <p:cNvPr id="14" name="Shape 12"/>
+          <p:cNvSpPr/>
+          <p:nvPr/>
+        </p:nvSpPr>
+        <p:spPr>
+          <a:xfrm>
+            <a:off x="7132396" y="91440"/>
+            <a:ext cx="4510659" cy="274320"/>
+          </a:xfrm>
+          <a:prstGeom prst="rect">
+            <a:avLst/>
+          </a:prstGeom>
+          <a:solidFill>
+            <a:srgbClr val="E0F2FE"/>
+          </a:solidFill>
+          <a:ln w="12700">
+            <a:solidFill>
+              <a:srgbClr val="0369A1"/>
+            </a:solidFill>
+            <a:prstDash val="solid"/>
+          </a:ln>
+        </p:spPr>
+      </p:sp>
+      <p:sp>
+        <p:nvSpPr>
+          <p:cNvPr id="15" name="Shape 13"/>
+          <p:cNvSpPr/>
+          <p:nvPr/>
+        </p:nvSpPr>
+        <p:spPr>
+          <a:xfrm>
+            <a:off x="7132396" y="91440"/>
+            <a:ext cx="73152" cy="274320"/>
+          </a:xfrm>
+          <a:prstGeom prst="rect">
+            <a:avLst/>
+          </a:prstGeom>
+          <a:solidFill>
+            <a:srgbClr val="0369A1"/>
+          </a:solidFill>
+          <a:ln w="12700">
+            <a:solidFill>
+              <a:srgbClr val="0369A1"/>
+            </a:solidFill>
+            <a:prstDash val="solid"/>
+          </a:ln>
+        </p:spPr>
+      </p:sp>
       <p:pic>
         <p:nvPicPr>
-          <p:cNvPr id="15" name="Image 0" descr="preencoded.png">    </p:cNvPr>
+          <p:cNvPr id="16" name="Image 0" descr="preencoded.png">    </p:cNvPr>
           <p:cNvPicPr>
             <a:picLocks noChangeAspect="1"/>
           </p:cNvPicPr>
@@ -17640,6 +19455,83 @@
         </p:nvPicPr>
         <p:blipFill>
           <a:blip r:embed="rId1"/>
+          <a:stretch>
+            <a:fillRect/>
+          </a:stretch>
+        </p:blipFill>
+        <p:spPr>
+          <a:xfrm>
+            <a:off x="7260412" y="128016"/>
+            <a:ext cx="201168" cy="201168"/>
+          </a:xfrm>
+          <a:prstGeom prst="rect">
+            <a:avLst/>
+          </a:prstGeom>
+        </p:spPr>
+      </p:pic>
+      <p:sp>
+        <p:nvSpPr>
+          <p:cNvPr id="17" name="Text 14"/>
+          <p:cNvSpPr txBox="1"/>
+          <p:nvPr/>
+        </p:nvSpPr>
+        <p:spPr>
+          <a:xfrm>
+            <a:off x="7516444" y="91440"/>
+            <a:ext cx="4090035" cy="274320"/>
+          </a:xfrm>
+          <a:prstGeom prst="rect">
+            <a:avLst/>
+          </a:prstGeom>
+          <a:noFill/>
+          <a:ln/>
+        </p:spPr>
+        <p:txBody>
+          <a:bodyPr wrap="square" lIns="0" tIns="0" rIns="0" bIns="0" rtlCol="0" anchor="ctr"/>
+          <a:lstStyle/>
+          <a:p>
+            <a:pPr indent="0" marL="0">
+              <a:buNone/>
+            </a:pPr>
+            <a:r>
+              <a:rPr lang="en-US" sz="1100" b="1" dirty="0">
+                <a:solidFill>
+                  <a:srgbClr val="075985"/>
+                </a:solidFill>
+                <a:latin typeface="Calibri" pitchFamily="34" charset="0"/>
+                <a:ea typeface="Calibri" pitchFamily="34" charset="-122"/>
+                <a:cs typeface="Calibri" pitchFamily="34" charset="-120"/>
+              </a:rPr>
+              <a:t>DA COMPRENDERE OGGI</a:t>
+            </a:r>
+            <a:pPr indent="0" marL="0">
+              <a:buNone/>
+            </a:pPr>
+            <a:r>
+              <a:rPr lang="en-US" sz="1100" dirty="0">
+                <a:solidFill>
+                  <a:srgbClr val="075985"/>
+                </a:solidFill>
+                <a:latin typeface="Calibri" pitchFamily="34" charset="0"/>
+                <a:ea typeface="Calibri" pitchFamily="34" charset="-122"/>
+                <a:cs typeface="Calibri" pitchFamily="34" charset="-120"/>
+              </a:rPr>
+              <a:t> · tensione, corrente, legge di Ohm</a:t>
+            </a:r>
+            <a:endParaRPr lang="en-US" sz="1100" dirty="0"/>
+          </a:p>
+        </p:txBody>
+      </p:sp>
+      <p:pic>
+        <p:nvPicPr>
+          <p:cNvPr id="19" name="Image 1" descr="preencoded.png">    </p:cNvPr>
+          <p:cNvPicPr>
+            <a:picLocks noChangeAspect="1"/>
+          </p:cNvPicPr>
+          <p:nvPr/>
+        </p:nvPicPr>
+        <p:blipFill>
+          <a:blip r:embed="rId2"/>
           <a:stretch>
             <a:fillRect/>
           </a:stretch>
@@ -18230,6 +20122,133 @@
       </p:sp>
       <p:sp>
         <p:nvSpPr>
+          <p:cNvPr id="16" name="Shape 14"/>
+          <p:cNvSpPr/>
+          <p:nvPr/>
+        </p:nvSpPr>
+        <p:spPr>
+          <a:xfrm>
+            <a:off x="7132396" y="91440"/>
+            <a:ext cx="4510659" cy="274320"/>
+          </a:xfrm>
+          <a:prstGeom prst="rect">
+            <a:avLst/>
+          </a:prstGeom>
+          <a:solidFill>
+            <a:srgbClr val="E0F2FE"/>
+          </a:solidFill>
+          <a:ln w="12700">
+            <a:solidFill>
+              <a:srgbClr val="0369A1"/>
+            </a:solidFill>
+            <a:prstDash val="solid"/>
+          </a:ln>
+        </p:spPr>
+      </p:sp>
+      <p:sp>
+        <p:nvSpPr>
+          <p:cNvPr id="17" name="Shape 15"/>
+          <p:cNvSpPr/>
+          <p:nvPr/>
+        </p:nvSpPr>
+        <p:spPr>
+          <a:xfrm>
+            <a:off x="7132396" y="91440"/>
+            <a:ext cx="73152" cy="274320"/>
+          </a:xfrm>
+          <a:prstGeom prst="rect">
+            <a:avLst/>
+          </a:prstGeom>
+          <a:solidFill>
+            <a:srgbClr val="0369A1"/>
+          </a:solidFill>
+          <a:ln w="12700">
+            <a:solidFill>
+              <a:srgbClr val="0369A1"/>
+            </a:solidFill>
+            <a:prstDash val="solid"/>
+          </a:ln>
+        </p:spPr>
+      </p:sp>
+      <p:pic>
+        <p:nvPicPr>
+          <p:cNvPr id="18" name="Image 0" descr="preencoded.png">    </p:cNvPr>
+          <p:cNvPicPr>
+            <a:picLocks noChangeAspect="1"/>
+          </p:cNvPicPr>
+          <p:nvPr/>
+        </p:nvPicPr>
+        <p:blipFill>
+          <a:blip r:embed="rId1"/>
+          <a:stretch>
+            <a:fillRect/>
+          </a:stretch>
+        </p:blipFill>
+        <p:spPr>
+          <a:xfrm>
+            <a:off x="7260412" y="128016"/>
+            <a:ext cx="201168" cy="201168"/>
+          </a:xfrm>
+          <a:prstGeom prst="rect">
+            <a:avLst/>
+          </a:prstGeom>
+        </p:spPr>
+      </p:pic>
+      <p:sp>
+        <p:nvSpPr>
+          <p:cNvPr id="19" name="Text 16"/>
+          <p:cNvSpPr txBox="1"/>
+          <p:nvPr/>
+        </p:nvSpPr>
+        <p:spPr>
+          <a:xfrm>
+            <a:off x="7516444" y="91440"/>
+            <a:ext cx="4090035" cy="274320"/>
+          </a:xfrm>
+          <a:prstGeom prst="rect">
+            <a:avLst/>
+          </a:prstGeom>
+          <a:noFill/>
+          <a:ln/>
+        </p:spPr>
+        <p:txBody>
+          <a:bodyPr wrap="square" lIns="0" tIns="0" rIns="0" bIns="0" rtlCol="0" anchor="ctr"/>
+          <a:lstStyle/>
+          <a:p>
+            <a:pPr indent="0" marL="0">
+              <a:buNone/>
+            </a:pPr>
+            <a:r>
+              <a:rPr lang="en-US" sz="1100" b="1" dirty="0">
+                <a:solidFill>
+                  <a:srgbClr val="075985"/>
+                </a:solidFill>
+                <a:latin typeface="Calibri" pitchFamily="34" charset="0"/>
+                <a:ea typeface="Calibri" pitchFamily="34" charset="-122"/>
+                <a:cs typeface="Calibri" pitchFamily="34" charset="-120"/>
+              </a:rPr>
+              <a:t>DA COMPRENDERE OGGI</a:t>
+            </a:r>
+            <a:pPr indent="0" marL="0">
+              <a:buNone/>
+            </a:pPr>
+            <a:r>
+              <a:rPr lang="en-US" sz="1100" dirty="0">
+                <a:solidFill>
+                  <a:srgbClr val="075985"/>
+                </a:solidFill>
+                <a:latin typeface="Calibri" pitchFamily="34" charset="0"/>
+                <a:ea typeface="Calibri" pitchFamily="34" charset="-122"/>
+                <a:cs typeface="Calibri" pitchFamily="34" charset="-120"/>
+              </a:rPr>
+              <a:t> · tensione, corrente, legge di Ohm</a:t>
+            </a:r>
+            <a:endParaRPr lang="en-US" sz="1100" dirty="0"/>
+          </a:p>
+        </p:txBody>
+      </p:sp>
+      <p:sp>
+        <p:nvSpPr>
           <p:cNvPr id="25" name="Slide Number Placeholder 0"/>
           <p:cNvSpPr>
             <a:spLocks noGrp="1"/>
@@ -18819,6 +20838,133 @@
               <a:t>silicio: elemento 14, un semiconduttore, la materia prima di quasi tutti i chip</a:t>
             </a:r>
             <a:endParaRPr lang="en-US" sz="1900" dirty="0"/>
+          </a:p>
+        </p:txBody>
+      </p:sp>
+      <p:sp>
+        <p:nvSpPr>
+          <p:cNvPr id="16" name="Shape 14"/>
+          <p:cNvSpPr/>
+          <p:nvPr/>
+        </p:nvSpPr>
+        <p:spPr>
+          <a:xfrm>
+            <a:off x="7198055" y="91440"/>
+            <a:ext cx="4445000" cy="274320"/>
+          </a:xfrm>
+          <a:prstGeom prst="rect">
+            <a:avLst/>
+          </a:prstGeom>
+          <a:solidFill>
+            <a:srgbClr val="E0F2FE"/>
+          </a:solidFill>
+          <a:ln w="12700">
+            <a:solidFill>
+              <a:srgbClr val="0369A1"/>
+            </a:solidFill>
+            <a:prstDash val="solid"/>
+          </a:ln>
+        </p:spPr>
+      </p:sp>
+      <p:sp>
+        <p:nvSpPr>
+          <p:cNvPr id="17" name="Shape 15"/>
+          <p:cNvSpPr/>
+          <p:nvPr/>
+        </p:nvSpPr>
+        <p:spPr>
+          <a:xfrm>
+            <a:off x="7198055" y="91440"/>
+            <a:ext cx="73152" cy="274320"/>
+          </a:xfrm>
+          <a:prstGeom prst="rect">
+            <a:avLst/>
+          </a:prstGeom>
+          <a:solidFill>
+            <a:srgbClr val="0369A1"/>
+          </a:solidFill>
+          <a:ln w="12700">
+            <a:solidFill>
+              <a:srgbClr val="0369A1"/>
+            </a:solidFill>
+            <a:prstDash val="solid"/>
+          </a:ln>
+        </p:spPr>
+      </p:sp>
+      <p:pic>
+        <p:nvPicPr>
+          <p:cNvPr id="18" name="Image 0" descr="preencoded.png">    </p:cNvPr>
+          <p:cNvPicPr>
+            <a:picLocks noChangeAspect="1"/>
+          </p:cNvPicPr>
+          <p:nvPr/>
+        </p:nvPicPr>
+        <p:blipFill>
+          <a:blip r:embed="rId1"/>
+          <a:stretch>
+            <a:fillRect/>
+          </a:stretch>
+        </p:blipFill>
+        <p:spPr>
+          <a:xfrm>
+            <a:off x="7326071" y="128016"/>
+            <a:ext cx="201168" cy="201168"/>
+          </a:xfrm>
+          <a:prstGeom prst="rect">
+            <a:avLst/>
+          </a:prstGeom>
+        </p:spPr>
+      </p:pic>
+      <p:sp>
+        <p:nvSpPr>
+          <p:cNvPr id="19" name="Text 16"/>
+          <p:cNvSpPr txBox="1"/>
+          <p:nvPr/>
+        </p:nvSpPr>
+        <p:spPr>
+          <a:xfrm>
+            <a:off x="7582103" y="91440"/>
+            <a:ext cx="4024376" cy="274320"/>
+          </a:xfrm>
+          <a:prstGeom prst="rect">
+            <a:avLst/>
+          </a:prstGeom>
+          <a:noFill/>
+          <a:ln/>
+        </p:spPr>
+        <p:txBody>
+          <a:bodyPr wrap="square" lIns="0" tIns="0" rIns="0" bIns="0" rtlCol="0" anchor="ctr"/>
+          <a:lstStyle/>
+          <a:p>
+            <a:pPr indent="0" marL="0">
+              <a:buNone/>
+            </a:pPr>
+            <a:r>
+              <a:rPr lang="en-US" sz="1100" b="1" dirty="0">
+                <a:solidFill>
+                  <a:srgbClr val="075985"/>
+                </a:solidFill>
+                <a:latin typeface="Calibri" pitchFamily="34" charset="0"/>
+                <a:ea typeface="Calibri" pitchFamily="34" charset="-122"/>
+                <a:cs typeface="Calibri" pitchFamily="34" charset="-120"/>
+              </a:rPr>
+              <a:t>DA COMPRENDERE OGGI</a:t>
+            </a:r>
+            <a:pPr indent="0" marL="0">
+              <a:buNone/>
+            </a:pPr>
+            <a:r>
+              <a:rPr lang="en-US" sz="1100" dirty="0">
+                <a:solidFill>
+                  <a:srgbClr val="075985"/>
+                </a:solidFill>
+                <a:latin typeface="Calibri" pitchFamily="34" charset="0"/>
+                <a:ea typeface="Calibri" pitchFamily="34" charset="-122"/>
+                <a:cs typeface="Calibri" pitchFamily="34" charset="-120"/>
+              </a:rPr>
+              <a:t> · il transistor come interruttore</a:t>
+            </a:r>
+            <a:endParaRPr lang="en-US" sz="1100" dirty="0"/>
           </a:p>
         </p:txBody>
       </p:sp>
@@ -20411,6 +22557,133 @@
       </p:graphicFrame>
       <p:sp>
         <p:nvSpPr>
+          <p:cNvPr id="4" name="Shape 1"/>
+          <p:cNvSpPr/>
+          <p:nvPr/>
+        </p:nvSpPr>
+        <p:spPr>
+          <a:xfrm>
+            <a:off x="7198055" y="91440"/>
+            <a:ext cx="4445000" cy="274320"/>
+          </a:xfrm>
+          <a:prstGeom prst="rect">
+            <a:avLst/>
+          </a:prstGeom>
+          <a:solidFill>
+            <a:srgbClr val="E0F2FE"/>
+          </a:solidFill>
+          <a:ln w="12700">
+            <a:solidFill>
+              <a:srgbClr val="0369A1"/>
+            </a:solidFill>
+            <a:prstDash val="solid"/>
+          </a:ln>
+        </p:spPr>
+      </p:sp>
+      <p:sp>
+        <p:nvSpPr>
+          <p:cNvPr id="5" name="Shape 2"/>
+          <p:cNvSpPr/>
+          <p:nvPr/>
+        </p:nvSpPr>
+        <p:spPr>
+          <a:xfrm>
+            <a:off x="7198055" y="91440"/>
+            <a:ext cx="73152" cy="274320"/>
+          </a:xfrm>
+          <a:prstGeom prst="rect">
+            <a:avLst/>
+          </a:prstGeom>
+          <a:solidFill>
+            <a:srgbClr val="0369A1"/>
+          </a:solidFill>
+          <a:ln w="12700">
+            <a:solidFill>
+              <a:srgbClr val="0369A1"/>
+            </a:solidFill>
+            <a:prstDash val="solid"/>
+          </a:ln>
+        </p:spPr>
+      </p:sp>
+      <p:pic>
+        <p:nvPicPr>
+          <p:cNvPr id="6" name="Image 0" descr="preencoded.png">    </p:cNvPr>
+          <p:cNvPicPr>
+            <a:picLocks noChangeAspect="1"/>
+          </p:cNvPicPr>
+          <p:nvPr/>
+        </p:nvPicPr>
+        <p:blipFill>
+          <a:blip r:embed="rId1"/>
+          <a:stretch>
+            <a:fillRect/>
+          </a:stretch>
+        </p:blipFill>
+        <p:spPr>
+          <a:xfrm>
+            <a:off x="7326071" y="128016"/>
+            <a:ext cx="201168" cy="201168"/>
+          </a:xfrm>
+          <a:prstGeom prst="rect">
+            <a:avLst/>
+          </a:prstGeom>
+        </p:spPr>
+      </p:pic>
+      <p:sp>
+        <p:nvSpPr>
+          <p:cNvPr id="7" name="Text 3"/>
+          <p:cNvSpPr txBox="1"/>
+          <p:nvPr/>
+        </p:nvSpPr>
+        <p:spPr>
+          <a:xfrm>
+            <a:off x="7582103" y="91440"/>
+            <a:ext cx="4024376" cy="274320"/>
+          </a:xfrm>
+          <a:prstGeom prst="rect">
+            <a:avLst/>
+          </a:prstGeom>
+          <a:noFill/>
+          <a:ln/>
+        </p:spPr>
+        <p:txBody>
+          <a:bodyPr wrap="square" lIns="0" tIns="0" rIns="0" bIns="0" rtlCol="0" anchor="ctr"/>
+          <a:lstStyle/>
+          <a:p>
+            <a:pPr indent="0" marL="0">
+              <a:buNone/>
+            </a:pPr>
+            <a:r>
+              <a:rPr lang="en-US" sz="1100" b="1" dirty="0">
+                <a:solidFill>
+                  <a:srgbClr val="075985"/>
+                </a:solidFill>
+                <a:latin typeface="Calibri" pitchFamily="34" charset="0"/>
+                <a:ea typeface="Calibri" pitchFamily="34" charset="-122"/>
+                <a:cs typeface="Calibri" pitchFamily="34" charset="-120"/>
+              </a:rPr>
+              <a:t>DA COMPRENDERE OGGI</a:t>
+            </a:r>
+            <a:pPr indent="0" marL="0">
+              <a:buNone/>
+            </a:pPr>
+            <a:r>
+              <a:rPr lang="en-US" sz="1100" dirty="0">
+                <a:solidFill>
+                  <a:srgbClr val="075985"/>
+                </a:solidFill>
+                <a:latin typeface="Calibri" pitchFamily="34" charset="0"/>
+                <a:ea typeface="Calibri" pitchFamily="34" charset="-122"/>
+                <a:cs typeface="Calibri" pitchFamily="34" charset="-120"/>
+              </a:rPr>
+              <a:t> · il transistor come interruttore</a:t>
+            </a:r>
+            <a:endParaRPr lang="en-US" sz="1100" dirty="0"/>
+          </a:p>
+        </p:txBody>
+      </p:sp>
+      <p:sp>
+        <p:nvSpPr>
           <p:cNvPr id="25" name="Slide Number Placeholder 0"/>
           <p:cNvSpPr>
             <a:spLocks noGrp="1"/>
@@ -20577,9 +22850,59 @@
           </a:ln>
         </p:spPr>
       </p:sp>
+      <p:sp>
+        <p:nvSpPr>
+          <p:cNvPr id="5" name="Shape 3"/>
+          <p:cNvSpPr/>
+          <p:nvPr/>
+        </p:nvSpPr>
+        <p:spPr>
+          <a:xfrm>
+            <a:off x="7198055" y="91440"/>
+            <a:ext cx="4445000" cy="274320"/>
+          </a:xfrm>
+          <a:prstGeom prst="rect">
+            <a:avLst/>
+          </a:prstGeom>
+          <a:solidFill>
+            <a:srgbClr val="E0F2FE"/>
+          </a:solidFill>
+          <a:ln w="12700">
+            <a:solidFill>
+              <a:srgbClr val="0369A1"/>
+            </a:solidFill>
+            <a:prstDash val="solid"/>
+          </a:ln>
+        </p:spPr>
+      </p:sp>
+      <p:sp>
+        <p:nvSpPr>
+          <p:cNvPr id="6" name="Shape 4"/>
+          <p:cNvSpPr/>
+          <p:nvPr/>
+        </p:nvSpPr>
+        <p:spPr>
+          <a:xfrm>
+            <a:off x="7198055" y="91440"/>
+            <a:ext cx="73152" cy="274320"/>
+          </a:xfrm>
+          <a:prstGeom prst="rect">
+            <a:avLst/>
+          </a:prstGeom>
+          <a:solidFill>
+            <a:srgbClr val="0369A1"/>
+          </a:solidFill>
+          <a:ln w="12700">
+            <a:solidFill>
+              <a:srgbClr val="0369A1"/>
+            </a:solidFill>
+            <a:prstDash val="solid"/>
+          </a:ln>
+        </p:spPr>
+      </p:sp>
       <p:pic>
         <p:nvPicPr>
-          <p:cNvPr id="6" name="Image 0" descr="preencoded.png">    </p:cNvPr>
+          <p:cNvPr id="7" name="Image 0" descr="preencoded.png">    </p:cNvPr>
           <p:cNvPicPr>
             <a:picLocks noChangeAspect="1"/>
           </p:cNvPicPr>
@@ -20593,17 +22916,70 @@
         </p:blipFill>
         <p:spPr>
           <a:xfrm>
-            <a:off x="973325" y="1828800"/>
-            <a:ext cx="2168150" cy="1737360"/>
+            <a:off x="7326071" y="128016"/>
+            <a:ext cx="201168" cy="201168"/>
           </a:xfrm>
           <a:prstGeom prst="rect">
             <a:avLst/>
           </a:prstGeom>
         </p:spPr>
       </p:pic>
+      <p:sp>
+        <p:nvSpPr>
+          <p:cNvPr id="8" name="Text 5"/>
+          <p:cNvSpPr txBox="1"/>
+          <p:nvPr/>
+        </p:nvSpPr>
+        <p:spPr>
+          <a:xfrm>
+            <a:off x="7582103" y="91440"/>
+            <a:ext cx="4024376" cy="274320"/>
+          </a:xfrm>
+          <a:prstGeom prst="rect">
+            <a:avLst/>
+          </a:prstGeom>
+          <a:noFill/>
+          <a:ln/>
+        </p:spPr>
+        <p:txBody>
+          <a:bodyPr wrap="square" lIns="0" tIns="0" rIns="0" bIns="0" rtlCol="0" anchor="ctr"/>
+          <a:lstStyle/>
+          <a:p>
+            <a:pPr indent="0" marL="0">
+              <a:buNone/>
+            </a:pPr>
+            <a:r>
+              <a:rPr lang="en-US" sz="1100" b="1" dirty="0">
+                <a:solidFill>
+                  <a:srgbClr val="075985"/>
+                </a:solidFill>
+                <a:latin typeface="Calibri" pitchFamily="34" charset="0"/>
+                <a:ea typeface="Calibri" pitchFamily="34" charset="-122"/>
+                <a:cs typeface="Calibri" pitchFamily="34" charset="-120"/>
+              </a:rPr>
+              <a:t>DA COMPRENDERE OGGI</a:t>
+            </a:r>
+            <a:pPr indent="0" marL="0">
+              <a:buNone/>
+            </a:pPr>
+            <a:r>
+              <a:rPr lang="en-US" sz="1100" dirty="0">
+                <a:solidFill>
+                  <a:srgbClr val="075985"/>
+                </a:solidFill>
+                <a:latin typeface="Calibri" pitchFamily="34" charset="0"/>
+                <a:ea typeface="Calibri" pitchFamily="34" charset="-122"/>
+                <a:cs typeface="Calibri" pitchFamily="34" charset="-120"/>
+              </a:rPr>
+              <a:t> · il transistor come interruttore</a:t>
+            </a:r>
+            <a:endParaRPr lang="en-US" sz="1100" dirty="0"/>
+          </a:p>
+        </p:txBody>
+      </p:sp>
       <p:pic>
         <p:nvPicPr>
-          <p:cNvPr id="7" name="Image 1" descr="preencoded.png">    </p:cNvPr>
+          <p:cNvPr id="10" name="Image 1" descr="preencoded.png">    </p:cNvPr>
           <p:cNvPicPr>
             <a:picLocks noChangeAspect="1"/>
           </p:cNvPicPr>
@@ -20617,6 +22993,30 @@
         </p:blipFill>
         <p:spPr>
           <a:xfrm>
+            <a:off x="973325" y="1828800"/>
+            <a:ext cx="2168150" cy="1737360"/>
+          </a:xfrm>
+          <a:prstGeom prst="rect">
+            <a:avLst/>
+          </a:prstGeom>
+        </p:spPr>
+      </p:pic>
+      <p:pic>
+        <p:nvPicPr>
+          <p:cNvPr id="11" name="Image 2" descr="preencoded.png">    </p:cNvPr>
+          <p:cNvPicPr>
+            <a:picLocks noChangeAspect="1"/>
+          </p:cNvPicPr>
+          <p:nvPr/>
+        </p:nvPicPr>
+        <p:blipFill>
+          <a:blip r:embed="rId3"/>
+          <a:stretch>
+            <a:fillRect/>
+          </a:stretch>
+        </p:blipFill>
+        <p:spPr>
+          <a:xfrm>
             <a:off x="973325" y="4297680"/>
             <a:ext cx="2168150" cy="1737360"/>
           </a:xfrm>
@@ -20627,7 +23027,7 @@
       </p:pic>
       <p:sp>
         <p:nvSpPr>
-          <p:cNvPr id="8" name="Text 3"/>
+          <p:cNvPr id="12" name="Text 6"/>
           <p:cNvSpPr txBox="1"/>
           <p:nvPr/>
         </p:nvSpPr>
@@ -20666,7 +23066,7 @@
       </p:sp>
       <p:sp>
         <p:nvSpPr>
-          <p:cNvPr id="9" name="Text 4"/>
+          <p:cNvPr id="13" name="Text 7"/>
           <p:cNvSpPr txBox="1"/>
           <p:nvPr/>
         </p:nvSpPr>
@@ -21354,7 +23754,7 @@
       </p:graphicFrame>
       <p:sp>
         <p:nvSpPr>
-          <p:cNvPr id="11" name="Shape 5"/>
+          <p:cNvPr id="15" name="Shape 8"/>
           <p:cNvSpPr/>
           <p:nvPr/>
         </p:nvSpPr>
@@ -21379,7 +23779,7 @@
       </p:sp>
       <p:sp>
         <p:nvSpPr>
-          <p:cNvPr id="12" name="Text 6"/>
+          <p:cNvPr id="16" name="Text 9"/>
           <p:cNvSpPr txBox="1"/>
           <p:nvPr/>
         </p:nvSpPr>
@@ -21421,7 +23821,7 @@
       </p:sp>
       <p:sp>
         <p:nvSpPr>
-          <p:cNvPr id="13" name="Shape 7"/>
+          <p:cNvPr id="17" name="Shape 10"/>
           <p:cNvSpPr/>
           <p:nvPr/>
         </p:nvSpPr>
@@ -21446,7 +23846,7 @@
       </p:sp>
       <p:sp>
         <p:nvSpPr>
-          <p:cNvPr id="14" name="Text 8"/>
+          <p:cNvPr id="18" name="Text 11"/>
           <p:cNvSpPr txBox="1"/>
           <p:nvPr/>
         </p:nvSpPr>
@@ -21488,7 +23888,7 @@
       </p:sp>
       <p:sp>
         <p:nvSpPr>
-          <p:cNvPr id="15" name="Shape 9"/>
+          <p:cNvPr id="19" name="Shape 12"/>
           <p:cNvSpPr/>
           <p:nvPr/>
         </p:nvSpPr>
@@ -21513,7 +23913,7 @@
       </p:sp>
       <p:sp>
         <p:nvSpPr>
-          <p:cNvPr id="16" name="Text 10"/>
+          <p:cNvPr id="20" name="Text 13"/>
           <p:cNvSpPr txBox="1"/>
           <p:nvPr/>
         </p:nvSpPr>
@@ -21555,7 +23955,7 @@
       </p:sp>
       <p:sp>
         <p:nvSpPr>
-          <p:cNvPr id="17" name="Shape 11"/>
+          <p:cNvPr id="21" name="Shape 14"/>
           <p:cNvSpPr/>
           <p:nvPr/>
         </p:nvSpPr>
@@ -21580,7 +23980,7 @@
       </p:sp>
       <p:sp>
         <p:nvSpPr>
-          <p:cNvPr id="18" name="Text 12"/>
+          <p:cNvPr id="22" name="Text 15"/>
           <p:cNvSpPr txBox="1"/>
           <p:nvPr/>
         </p:nvSpPr>

--- a/it/slides/10-Architettura_dei_Calcolatori-Elettronica.pptx
+++ b/it/slides/10-Architettura_dei_Calcolatori-Elettronica.pptx
@@ -126,13 +126,13 @@
   <p:extLst>
     <p:ext uri="{521415D9-36F7-43E2-AB2F-B90AF26B5E84}">
       <p14:sectionLst xmlns:p14="http://schemas.microsoft.com/office/powerpoint/2010/main">
-        <p14:section name="Apertura" id="{e332e784-68b6-144b-9f97-f1afbb5aac0e}">
+        <p14:section name="Apertura" id="{69212472-928d-5b4a-89d3-fb6cd3e4a0c1}">
           <p14:sldIdLst>
             <p14:sldId id="256"/>
             <p14:sldId id="257"/>
           </p14:sldIdLst>
         </p14:section>
-        <p14:section name="L'elettricità in quattro grandezze" id="{0dae2bde-9e0f-9c59-b653-2a7365512a0e}">
+        <p14:section name="L'elettricità in quattro grandezze" id="{0d421cbf-d35b-f7f8-6db9-1b98825994de}">
           <p14:sldIdLst>
             <p14:sldId id="258"/>
             <p14:sldId id="259"/>
@@ -140,14 +140,14 @@
             <p14:sldId id="261"/>
           </p14:sldIdLst>
         </p14:section>
-        <p14:section name="Semiconduttori" id="{d2389c38-c999-b833-66d8-9ae0bd9414d5}">
+        <p14:section name="Semiconduttori" id="{f5139081-3ce7-132e-9128-2f85f9d6b726}">
           <p14:sldIdLst>
             <p14:sldId id="262"/>
             <p14:sldId id="263"/>
             <p14:sldId id="264"/>
           </p14:sldIdLst>
         </p14:section>
-        <p14:section name="Dai volt ai bit" id="{ee9b945c-dd19-8afc-035e-3efe88d724aa}">
+        <p14:section name="Dai volt ai bit" id="{70c92b15-84b4-db01-cc72-c68ae8f66ecc}">
           <p14:sldIdLst>
             <p14:sldId id="265"/>
             <p14:sldId id="266"/>
@@ -157,7 +157,7 @@
             <p14:sldId id="270"/>
           </p14:sldIdLst>
         </p14:section>
-        <p14:section name="Ritorno alla macchina" id="{3bbc0806-e78f-f5c3-e0c3-4aafc0cc4c1c}">
+        <p14:section name="Ritorno alla macchina" id="{123da68f-8f3a-063b-ea80-6f6f86cd355b}">
           <p14:sldIdLst>
             <p14:sldId id="271"/>
             <p14:sldId id="272"/>

--- a/it/slides/10-Architettura_dei_Calcolatori-Elettronica.pptx
+++ b/it/slides/10-Architettura_dei_Calcolatori-Elettronica.pptx
@@ -126,13 +126,13 @@
   <p:extLst>
     <p:ext uri="{521415D9-36F7-43E2-AB2F-B90AF26B5E84}">
       <p14:sectionLst xmlns:p14="http://schemas.microsoft.com/office/powerpoint/2010/main">
-        <p14:section name="Apertura" id="{69212472-928d-5b4a-89d3-fb6cd3e4a0c1}">
+        <p14:section name="Apertura" id="{c7bfb96e-17d2-1519-54f8-1028c4b1afb7}">
           <p14:sldIdLst>
             <p14:sldId id="256"/>
             <p14:sldId id="257"/>
           </p14:sldIdLst>
         </p14:section>
-        <p14:section name="L'elettricità in quattro grandezze" id="{0d421cbf-d35b-f7f8-6db9-1b98825994de}">
+        <p14:section name="L'elettricità in quattro grandezze" id="{fa75bde0-b428-8072-7c21-870e7f32902b}">
           <p14:sldIdLst>
             <p14:sldId id="258"/>
             <p14:sldId id="259"/>
@@ -140,14 +140,14 @@
             <p14:sldId id="261"/>
           </p14:sldIdLst>
         </p14:section>
-        <p14:section name="Semiconduttori" id="{f5139081-3ce7-132e-9128-2f85f9d6b726}">
+        <p14:section name="Semiconduttori" id="{94e1a22f-f956-3682-bbad-e1c0da9822d7}">
           <p14:sldIdLst>
             <p14:sldId id="262"/>
             <p14:sldId id="263"/>
             <p14:sldId id="264"/>
           </p14:sldIdLst>
         </p14:section>
-        <p14:section name="Dai volt ai bit" id="{70c92b15-84b4-db01-cc72-c68ae8f66ecc}">
+        <p14:section name="Dai volt ai bit" id="{216ef01e-e2d5-415b-2709-6d9ee3f7305c}">
           <p14:sldIdLst>
             <p14:sldId id="265"/>
             <p14:sldId id="266"/>
@@ -157,7 +157,7 @@
             <p14:sldId id="270"/>
           </p14:sldIdLst>
         </p14:section>
-        <p14:section name="Ritorno alla macchina" id="{123da68f-8f3a-063b-ea80-6f6f86cd355b}">
+        <p14:section name="Ritorno alla macchina" id="{ebdabd81-f120-e01d-592c-74edfac346c9}">
           <p14:sldIdLst>
             <p14:sldId id="271"/>
             <p14:sldId id="272"/>
@@ -570,7 +570,7 @@
           <a:p>
             <a:r>
               <a:rPr lang="en-US" dirty="0"/>
-              <a:t>Finora una porta è stata un simbolo e una tabella di verità. Questa lezione le dà un corpo. Segue un bit, quello di un pulsante del kit, dal dito che lo preme al registro che il vostro programma legge, e strada facendo spiega che cos'è un volt, che cosa fa un transistor, e come due transistor fanno un NOT. Non si presuppongono conoscenze di fisica. La citazione di Clarke è la sensazione da dissipare: un chip sembra magia solo finché non si vede di che cosa è fatto.
+              <a:t>Finora una porta è stata un simbolo e una tavola di verità; questa lezione le dà un corpo fisico. Segue un solo bit, quello di un pulsante del kit, dal dito che lo preme al registro che il programma legge, spiegando lungo il percorso che cos'è un volt, che cosa fa un transistor e come due transistor formano una porta NOT. Non si presuppone alcuna conoscenza di fisica. La citazione di Arthur C. Clarke nomina l'impressione che la lezione si propone di dissipare: un chip sembra magia solo finché non si vede di che cosa è fatto.
 Stato di apprendimento: DA COMPRENDERE OGGI, alla fine di questa lezione lo spiegate, lo seguite passo passo e lo applicate da soli; DA UTILIZZARE OGGI, oggi seguite e usate la ricetta; come funziona dentro si spiega più avanti, o non fa parte del corso; DA COMPRENDERE PIÙ AVANTI, riconoscete il nome e lo scopo; lo spiega una lezione successiva. Una slide senza etichetta è contesto: una storia, un esempio, una domanda, un esercizio.
 Stato di apprendimento di questa lezione. DA COMPRENDERE OGGI: gli ingressi con pull-up; tensione, corrente, legge di Ohm; il transistor come interruttore; dai volt ai bit; le porte CMOS. DA UTILIZZARE OGGI: il programma completo, gli strumenti di PRG32 (si usa, non si studia, in questo corso). DA COMPRENDERE PIÙ AVANTI: il clock (Lezione 13). Una slide senza etichetta è contesto: una storia, un esempio, una domanda, un esercizio.
 Per il docente: Lezione nuova del 2026/27, collocata tra l'algebra di Boole e le macchine combinatorie. Dà un corpo fisico alle porte delle Lezioni 08 e 09 prima che la Lezione 11 le componga in macchine. Spirale: il pulsante del kit, letto fin dai primi laboratori, viene seguito dal dito al bit. Non si presuppongono conoscenze di fisica; i numeri del kit vengono dal datasheet dell'ESP32-C6 (tabella 5-4) e dalla documentazione hardware di PRG32.</a:t>
@@ -661,7 +661,7 @@
           <a:p>
             <a:r>
               <a:rPr lang="en-US" dirty="0"/>
-              <a:t>Un circuito digitale non usa tensioni esatte: usa due intervalli. La figura li mostra per il kit. Un'uscita garantisce livelli puliti: sopra 2,64 V per un 1, sotto 0,33 V per uno 0. Un ingresso è più tollerante: legge 1 sopra 2,475 V e 0 sotto 0,825 V. La differenza tra ciò che un'uscita garantisce e ciò che un ingresso richiede è il margine di rumore: un disturbo più piccolo non può cambiare il bit. Tra le due soglie di ingresso il valore è indefinito, e i segnali devono attraversare quella fascia in fretta.
+              <a:t>Un circuito digitale non usa tensioni esatte ma due intervalli, mostrati nella figura per il kit. Un'uscita garantisce livelli puliti: sopra 2,64 V per un 1, sotto 0,33 V per uno 0. Un ingresso è più tollerante: legge 1 sopra 2,475 V e 0 sotto 0,825 V. La differenza tra ciò che un'uscita garantisce e ciò che un ingresso richiede è il margine di rumore: un disturbo minore del margine non può alterare il bit. Tra le due soglie di ingresso il valore logico non è definito, e i segnali devono attraversare quella fascia rapidamente.
 DA COMPRENDERE OGGI: dai volt ai bit.
 Per il docente: Datasheet dell'ESP32-C6, tabella 5-4, con VDD = 3,3 V: VOH min 0,8 VDD, VOL max 0,1 VDD, VIH min 0,75 VDD, VIL max 0,25 VDD. Margini di rumore: 2,64 - 2,475 = 0,165 V in alto, 0,825 - 0,33 = 0,495 V in basso. È la soglia «metà della tensione di alimentazione» della Lezione 13, resa precisa.</a:t>
             </a:r>
@@ -751,7 +751,7 @@
           <a:p>
             <a:r>
               <a:rPr lang="en-US" dirty="0"/>
-              <a:t>Perché rinunciare alla ricchezza dei segnali analogici? In un circuito analogico l'informazione è il valore esatto, quindi ogni stadio aggiunge un po' di rumore, e il rumore si accumula: ogni copia è peggiore della precedente. In un circuito digitale conta solo l'intervallo, e ogni porta produce un livello fresco e pulito: il rumore non si accumula, le copie sono perfette, e gli errori si possono perfino rilevare e correggere. I circuiti analogici restano indispensabili ai bordi di un sistema, dove tocca il mondo: sensori, radio, suono.
+              <a:t>Perché rinunciare alla ricchezza dei segnali analogici? In un circuito analogico il valore esatto è l'informazione, quindi ogni stadio aggiunge un po' di rumore e il rumore si accumula: ogni copia è peggiore della precedente. In un circuito digitale conta solo l'intervallo, e ogni porta rigenera un livello nuovo e pulito: il rumore non si accumula, le copie sono perfette, e gli errori si possono persino rilevare e correggere, come mostra la Lezione 11 con la parità. I circuiti analogici restano indispensabili ai confini di un sistema, dove esso incontra il mondo fisico: sensori, radio, suono.
 DA COMPRENDERE OGGI: dai volt ai bit.
 Per il docente: La storia analogico-digitale della Lezione 04, vista dal filo. L'amplificatore audio e la radio del kit sono i bordi analogici di un sistema per il resto digitale.</a:t>
             </a:r>
@@ -841,7 +841,7 @@
           <a:p>
             <a:r>
               <a:rPr lang="en-US" dirty="0"/>
-              <a:t>La prima porta. Un pMOS collega l'uscita all'alimentazione, un nMOS la collega a massa, ed entrambi i gate sono pilotati dallo stesso ingresso. Con l'ingresso a 0 conduce il pMOS e l'uscita vale 1; con l'ingresso a 1 conduce l'nMOS e l'uscita vale 0. È un NOT. In ogni istante conduce esattamente uno dei due transistor, quindi a ingresso fermo non scorre corrente dall'alimentazione a massa: ecco perché a riposo il CMOS non consuma quasi nulla.
+              <a:t>La prima porta. Un pMOS collega l'uscita all'alimentazione, un nMOS la collega alla massa, ed entrambi i gate sono pilotati dallo stesso ingresso. Con l'ingresso a 0 il pMOS conduce e l'uscita vale 1; con l'ingresso a 1 conduce l'nMOS e l'uscita vale 0. Il circuito è un NOT. Con un ingresso stabile conduce esattamente uno dei due transistor, quindi a riposo non scorre corrente dall'alimentazione alla massa: è per questo che il CMOS consuma una potenza statica quasi nulla, e la ragione della sua adozione universale.
 DA COMPRENDERE OGGI: le porte CMOS.
 Per il docente: CMOS: MOS complementare. Y = A'. La rete di pull-up (pMOS) e la rete di pull-down (nMOS) sono l'una la duale dell'altra, come nel principio di dualità della Lezione 08.</a:t>
             </a:r>
@@ -931,7 +931,7 @@
           <a:p>
             <a:r>
               <a:rPr lang="en-US" dirty="0"/>
-              <a:t>Due ingressi, quattro transistor. Nel NAND i due nMOS sono in serie: l'uscita raggiunge massa solo se A e B valgono entrambi 1. I due pMOS sono in parallelo: l'uscita raggiunge l'alimentazione se uno dei due ingressi vale 0. Serie è AND, parallelo è OR. Il NOR è il duale: serie e parallelo si scambiano, esattamente come le leggi di De Morgan scambiano AND e OR. Verificate voi entrambi i disegni per le quattro combinazioni degli ingressi, segnando quali transistor conducono.
+              <a:t>Due ingressi, quattro transistor. Nel NAND i due nMOS sono in serie: l'uscita è collegata alla massa solo se A e B valgono entrambi 1. I due pMOS sono in parallelo: l'uscita è collegata all'alimentazione se uno qualsiasi degli ingressi vale 0. La serie realizza l'AND, il parallelo l'OR. Il NOR è il circuito duale, con serie e parallelo scambiati, esattamente come le leggi di De Morgan scambiano AND e OR. Entrambi i disegni vanno verificati per le quattro combinazioni degli ingressi, segnando in ciascun caso quali transistor conducono.
 DA COMPRENDERE OGGI: le porte CMOS.
 Per il docente: Serie è AND, parallelo è OR: l'idea dei circuiti a commutazione di Nakajima e Shannon (Lezione 03). Quattro transistor ciascuna. Chiedere all'aula di verificare sul disegno le quattro combinazioni di ingresso.</a:t>
             </a:r>
@@ -1021,7 +1021,7 @@
           <a:p>
             <a:r>
               <a:rPr lang="en-US" dirty="0"/>
-              <a:t>Il costo dei circuiti in transistor. Un NOT costa 2, un NAND o un NOR 4, un AND o un OR 6, perché sono un NAND o un NOR seguito da un invertitore. Questo rovescia l'intuizione dell'algebra: in CMOS vengono prima le porte invertenti, e un AND costa più di un NAND. Un sommatore completo richiede circa 28 transistor, una cella di memoria 6, un flip-flop circa 20. Ora lo scopo della minimizzazione è concreto: meno letterali significano meno transistor, meno area, meno energia e meno tempo.
+              <a:t>Il costo dei circuiti misurato in transistor. Un NOT costa 2, un NAND o un NOR 4, un AND o un OR 6, perché ciascuno è un NAND o un NOR seguito da un invertitore. Questo rovescia l'intuizione suggerita dall'algebra: in CMOS le porte invertenti sono quelle primitive, e un AND costa più di un NAND. Un sommatore completo richiede circa 28 transistor, una cella di memoria 6, un flip-flop circa 20. Lo scopo della minimizzazione diventa ora concreto: meno letterali significano meno transistor, e quindi meno area, meno energia e meno ritardo.
 DA COMPRENDERE OGGI: le porte CMOS.
 Per il docente: Ecco perché NAND è la porta universale della Lezione 09 in pratica oltre che in teoria: un AND costa più di un NAND. I conteggi valgono per il CMOS statico convenzionale e variano con lo stile di progetto. Trentadue sommatori completi: circa 900 transistor per l'addizionatore che sta dietro l'istruzione add.</a:t>
             </a:r>
@@ -1111,7 +1111,7 @@
           <a:p>
             <a:r>
               <a:rPr lang="en-US" dirty="0"/>
-              <a:t>L'uscita di una porta pilota gli ingressi di altre porte, che sono piccoli condensatori. Per cambiare livello deve caricarli o scaricarli attraverso la resistenza dei propri transistor, e questo richiede tempo: il ritardo di propagazione. Richiede anche energia, a ogni cambio di livello. La potenza spesa nel commutare è circa C per V al quadrato per f: la capacità, il quadrato della tensione di alimentazione, e la frequenza. Abbassare la tensione è ciò che fa risparmiare di più, ed è per questo che i chip sono passati da 5 V a circa 1 V all'interno. La velocità si paga in calore.
+              <a:t>L'uscita di una porta pilota gli ingressi di altre porte, che sono piccoli condensatori. Per cambiare livello deve caricarli o scaricarli attraverso la resistenza dei propri transistor, il che richiede tempo, il ritardo di propagazione, ed energia, a ogni transizione. La potenza dinamica è approssimativamente C per V^2 per f: capacità, quadrato della tensione di alimentazione e frequenza di commutazione. Ridurre la tensione dà il risparmio maggiore, ed è per questo che le tensioni di alimentazione interne sono scese da 5 V a circa 1 V. La velocità si paga in calore. Il ritardo di propagazione ricompare nella Lezione 11 come cammino critico e nella Lezione 13 come ragione del clock.
 DA COMPRENDERE OGGI: le porte CMOS. DA COMPRENDERE PIÙ AVANTI: il clock (si studia nella Lezione 13).
 Per il docente: C la capacità commutata, V l'alimentazione, f la frequenza di commutazione. Il ritardo di propagazione ritorna nella Lezione 11 come percorso critico, e nella Lezione 13 come ragione del clock. L'ESP32-C6 ha un'alimentazione a 3,3 V per i piedini e una tensione interna più bassa per la logica.</a:t>
             </a:r>
@@ -1201,7 +1201,7 @@
           <a:p>
             <a:r>
               <a:rPr lang="en-US" dirty="0"/>
-              <a:t>Un ingresso collegato a nulla è flottante: raccoglie rumore e legge 0 o 1 a caso. Il rimedio è una resistenza di pull-up che lega il piedino a 3,3 V. A pulsante rilasciato non scorre corrente, e il piedino legge un 1 pulito. A pulsante premuto l'interruttore collega il piedino a massa: 0 V, uno 0 pulito, e nella resistenza scorre una corrente trascurabile di 73 microampere. È un partitore di tensione il cui resistore inferiore è o infinito o zero. Il firmware poi inverte il bit, così nel vostro programma premuto vale 1.
+              <a:t>Un ingresso collegato a nulla è flottante: raccoglie rumore e legge 0 o 1 in modo imprevedibile. Il rimedio è una resistenza di pull-up che lega il piedino a 3,3 V. Con il pulsante rilasciato non scorre corrente, e il piedino legge un 1 pulito. Con il pulsante premuto l'interruttore collega il piedino alla massa: 0 V, uno 0 pulito, mentre nella resistenza scorre una corrente trascurabile di 73 microampere. Il circuito è un partitore di tensione la cui resistenza inferiore è o infinita o nulla. Il firmware poi inverte il bit, così che nel programma "premuto" si legge 1. Il riscaldamento è così spiegato per intero.
 DA COMPRENDERE OGGI: gli ingressi con pull-up.
 Per il docente: Pull-up debole interno dell'ESP32-C6: 45 kΩ tipici (datasheet). Il firmware lo attiva su ogni piedino dei pulsanti (prg32_input.c) e legge i piedini invertiti (prg32_controller.c). Il triangolo è il buffer di ingresso del piedino. Si chiama logica attiva bassa.</a:t>
             </a:r>
@@ -1291,8 +1291,8 @@
           <a:p>
             <a:r>
               <a:rPr lang="en-US" dirty="0"/>
-              <a:t>Applicate la legge di Ohm alla resistenza, non all'intero circuito. La resistenza vede l'alimentazione meno ciò che tiene il LED: 3,3 meno 2. Dividete quella tensione per la corrente, in ampere: 5 mA sono 0,005 A.
-Con l'ingresso a 0, quale dei due transistor ha il gate al livello che lo fa condurre? Un pMOS conduce con il gate basso, ed è quello collegato all'alimentazione. I due non conducono mai insieme, e l'uscita non resta mai scollegata.
+              <a:t>Per la prima domanda la legge di Ohm si applica alla sola resistenza, non all'intero circuito. La resistenza vede l'alimentazione meno ciò che il LED trattiene, 3,3 - 2 V, e quella tensione si divide per la corrente espressa in ampere: 5 mA è 0,005 A.
+Per la seconda ci si chiede quale dei due transistor ha il gate al livello che lo fa condurre quando l'ingresso vale 0. Un pMOS conduce con il gate basso, ed è quello collegato all'alimentazione. I due transistor non conducono mai insieme, e l'uscita non resta mai scollegata.
 Per il docente: 1. Risposta: B. R = (3,3 - 2) / 0,005 = 260 Ω.
 2. Risposta: B. Un gate basso chiude il pMOS, che collega l'uscita all'alimentazione; l'nMOS è aperto.</a:t>
             </a:r>
@@ -1382,8 +1382,8 @@
           <a:p>
             <a:r>
               <a:rPr lang="en-US" dirty="0"/>
-              <a:t>In CMOS un AND non si costruisce direttamente: è un NAND seguito da un invertitore. Sommate i transistor dei due.
-Pensate al pulsante rilasciato: il piedino non è collegato a nulla. Che cosa leggerebbe? Il pull-up non ha nulla a che vedere con il LED, con la velocità o con la protezione: dà all'ingresso un livello definito quando l'interruttore è aperto.
+              <a:t>Per la prima domanda: in CMOS un AND non si costruisce direttamente ma come un NAND seguito da un invertitore, quindi si sommano i transistor dei due.
+Per la seconda si considera il pulsante rilasciato: il piedino è allora collegato a nulla. Che cosa leggerebbe? Il pull-up non ha a che fare con il LED, con la velocità o con la protezione: dà all'ingresso un livello definito quando l'interruttore è aperto.
 Per il docente: 1. Risposta: C. Un NAND (4) seguito da un invertitore (2).
 2. Risposta: B. Senza, il piedino rilasciato sarebbe flottante; il pull-up lo lega a 3,3 V, e l'interruttore premuto prevale portandolo a massa.</a:t>
             </a:r>
@@ -1473,7 +1473,7 @@
           <a:p>
             <a:r>
               <a:rPr lang="en-US" dirty="0"/>
-              <a:t>Quattordici termini. Notate due falsi amici: voltage è la tensione, e ground è la massa. Capacitor è il condensatore. Gate, source e drain non si traducono. Noise margin è il margine di rumore, e floating input è l'ingresso flottante.</a:t>
+              <a:t>Quattordici termini. Due falsi amici meritano attenzione: voltage in italiano è tensione, e ground è massa. Un capacitor è un condensatore. Gate, source e drain non si traducono. Il noise margin è il margine di rumore, e un floating input è un ingresso flottante.</a:t>
             </a:r>
             <a:endParaRPr lang="en-US" dirty="0"/>
           </a:p>
@@ -1561,7 +1561,7 @@
           <a:p>
             <a:r>
               <a:rPr lang="en-US" dirty="0"/>
-              <a:t>Sei obiettivi. Usare le quattro grandezze elettriche e la legge di Ohm su un circuito semplice. Dimensionare la resistenza di un LED e calcolare un partitore di tensione. Spiegare che cos'è un transistor e come un transistor MOS funziona da interruttore. Dire come una tensione diventa un valore logico, e che cos'è un margine di rumore. Disegnare in CMOS invertitore, NAND e NOR e contarne i transistor. E spiegare le resistenze di pull-up, gli ingressi flottanti e perché commutare una porta richiede tempo ed energia.</a:t>
+              <a:t>Sei risultati di apprendimento. Applicare le quattro grandezze elettriche e la legge di Ohm a un circuito semplice. Dimensionare la resistenza di un LED e calcolare un partitore di tensione. Spiegare che cos'è un transistor e come un transistor MOS funziona da interruttore. Dire come una tensione diventa un valore logico, e che cos'è un margine di rumore. Disegnare l'invertitore, il NAND e il NOR CMOS e contarne i transistor. E spiegare le resistenze di pull-up, gli ingressi flottanti, e perché la commutazione di una porta costa tempo ed energia.</a:t>
             </a:r>
             <a:endParaRPr lang="en-US" dirty="0"/>
           </a:p>
@@ -1649,7 +1649,7 @@
           <a:p>
             <a:r>
               <a:rPr lang="en-US" dirty="0"/>
-              <a:t>Cinque conclusioni. La tensione spinge, la corrente scorre, la resistenza ostacola, e la legge di Ohm copre quasi tutto ciò che serve a un progettista digitale. Un transistor MOS è un interruttore comandato da una tensione, in due tipi complementari. Un bit è un intervallo di tensioni, reso affidabile dai margini di rumore e dalla rigenerazione dei livelli. Le porte CMOS sono coppie di reti di interruttori, e quelle invertenti sono le più economiche. Commutare costa tempo ed energia. La prossima lezione costruisce macchine con queste porte.
+              <a:t>Cinque conclusioni. La tensione spinge, la corrente scorre, la resistenza si oppone, e la legge di Ohm copre gran parte di ciò che serve a un progettista digitale. Un transistor MOS è un interruttore comandato in tensione, disponibile in due tipi complementari. Un bit è un intervallo di tensioni, reso affidabile dai margini di rumore e dalla rigenerazione dei livelli a ogni porta. Le porte CMOS sono coppie di reti di interruttori complementari, e le porte invertenti sono le più economiche. La commutazione costa tempo ed energia. La prossima lezione costruisce con queste porte delle macchine funzionali.
 Stato di apprendimento, riepilogo. DA COMPRENDERE OGGI: gli ingressi con pull-up; tensione, corrente, legge di Ohm; il transistor come interruttore; dai volt ai bit; le porte CMOS. DA UTILIZZARE OGGI: il programma completo, gli strumenti di PRG32 (si usa, non si studia, in questo corso). DA COMPRENDERE PIÙ AVANTI: il clock (Lezione 13). Una slide senza etichetta è contesto: una storia, un esempio, una domanda, un esercizio.
 Per il docente: Prossima lezione: le macchine combinatorie, costruite con queste porte.</a:t>
             </a:r>
@@ -1739,7 +1739,7 @@
           <a:p>
             <a:r>
               <a:rPr lang="en-US" dirty="0"/>
-              <a:t>Quattro grandezze, con l'analogia dell'acqua nei tubi. La tensione è la pressione che spinge; si misura in volt e sempre tra due punti. La corrente è la portata, in ampere. La resistenza è ciò che ostacola il flusso, in ohm. La potenza è il lavoro compiuto ogni secondo, in watt. L'ultima colonna lega ciascuna al kit: 3,3 V di alimentazione, circa 10 mA in un LED acceso, 45 kΩ dentro ogni piedino di ingresso. Ricordate la didascalia: dicendo che un piedino «sta a 3,3 V» si intende rispetto a massa, il riferimento comune.
+              <a:t>Quattro grandezze, introdotte con l'analogia dell'acqua nei tubi. La tensione è la pressione che spinge il flusso; si misura in volt ed è sempre definita tra due punti. La corrente è il flusso, in ampere. La resistenza è l'opposizione al flusso, in ohm. La potenza è il lavoro compiuto al secondo, in watt. L'ultima colonna lega ciascuna al kit: un'alimentazione di 3,3 V, circa 10 mA in un LED acceso, 45 kΩ dentro ogni piedino di ingresso. La didascalia fissa una convenzione: dire che un piedino "è a 3,3 V" significa 3,3 V rispetto alla massa, il riferimento comune.
 DA COMPRENDERE OGGI: tensione, corrente, legge di Ohm.
 Per il docente: La carica elettrica è trasportata dagli elettroni; la corrente è carica al secondo. Una tensione è sempre tra due punti: dicendo «il piedino sta a 3,3 V» si intende rispetto a massa, il riferimento comune dell'intero circuito. Prefissi: milli (m) 10^-3, micro (µ) 10^-6, kilo (k) 10^3, mega (M) 10^6.</a:t>
             </a:r>
@@ -1829,7 +1829,7 @@
           <a:p>
             <a:r>
               <a:rPr lang="en-US" dirty="0"/>
-              <a:t>La legge di Ohm: la tensione ai capi di un resistore è uguale alla sua resistenza per la corrente che lo attraversa. Un circuito è un anello chiuso, e il disegno mostra il più semplice tra quelli utili: un'alimentazione, un resistore e un LED. Il LED tiene per sé circa 2 V; alla resistenza vanno i restanti 1,3 V, e così fissa la corrente. Per 10 mA servono 1,3 diviso 0,010, cioè 130 Ω, e il valore commerciale più vicino è 150 Ω. Senza la resistenza la corrente sarebbe di gran lunga troppa e il LED brucerebbe.
+              <a:t>La legge di Ohm: la tensione ai capi di una resistenza è uguale alla resistenza moltiplicata per la corrente che la attraversa. Un circuito è un anello chiuso, e il disegno mostra il più semplice di quelli utili: un'alimentazione, una resistenza e un LED. Il LED trattiene ai suoi capi circa 2 V; la resistenza prende gli 1,3 V restanti e determina così la corrente. Per 10 mA la resistenza deve valere 1,3 / 0,010 = 130 Ω, e il valore standard più vicino è 150 Ω, che sbaglia nel senso di una corrente minore. Senza resistenza la corrente sarebbe limitata solo dall'alimentazione e il LED si distruggerebbe.
 DA COMPRENDERE OGGI: tensione, corrente, legge di Ohm.
 Per il docente: Georg Ohm, 1827. La tensione diretta di un LED dipende dal colore: circa 1,8-2,2 V per il rosso, circa 3 V per blu e bianco. Con 150 Ω la corrente è 1,3 / 150 = 8,7 mA.</a:t>
             </a:r>
@@ -1919,7 +1919,7 @@
           <a:p>
             <a:r>
               <a:rPr lang="en-US" dirty="0"/>
-              <a:t>Due modi di collegare i resistori. In serie la stessa corrente attraversa entrambi e le resistenze si sommano. In parallelo la stessa tensione è ai capi di entrambi e la resistenza totale è minore di ciascuna. Due resistori in serie formano un partitore di tensione: l'uscita, presa tra i due, è l'alimentazione moltiplicata per R2 diviso R1 più R2. Con resistori uguali è metà dell'alimentazione; se R2 è molto più piccola, l'uscita è vicina a massa. Tenete a mente il partitore: spiega il pulsante alla fine della lezione.
+              <a:t>Due modi di combinare le resistenze. In serie la stessa corrente attraversa entrambe e le resistenze si sommano. In parallelo la stessa tensione è applicata a entrambe e la resistenza complessiva è minore di ciascuna. Due resistenze in serie formano un partitore di tensione: l'uscita, presa nel loro punto di unione, è uguale all'alimentazione moltiplicata per R2/(R1 + R2). Con resistenze uguali è metà dell'alimentazione; se R2 è molto minore di R1, l'uscita si avvicina alla massa. Il partitore va tenuto a mente, perché spiega il circuito del pulsante alla fine della lezione.
 DA COMPRENDERE OGGI: tensione, corrente, legge di Ohm.
 Per il docente: Il partitore è la chiave del circuito di pull-up alla fine della lezione: un pulsante è un resistore che è o infinito (aperto) o quasi zero (chiuso). Parallelo: 1/R = 1/R1 + 1/R2.</a:t>
             </a:r>
@@ -2009,7 +2009,7 @@
           <a:p>
             <a:r>
               <a:rPr lang="en-US" dirty="0"/>
-              <a:t>Un condensatore immagazzina carica come un serbatoio l'acqua, e la sua tensione non può cambiare all'istante: va riempito o svuotato attraverso una resistenza. Il tempo necessario è dell'ordine di R per C. Per un piedino di ingresso del kit, 45 kΩ per 2 pF fanno 90 nanosecondi. Ogni filo e ogni ingresso di transistor è un piccolo condensatore, e da qui nasce il ritardo di una porta. Un condensatore carico o scarico è anche un modo di memorizzare un bit: lo ritroverete nella lezione sulla memoria.
+              <a:t>Un condensatore immagazzina carica come un serbatoio immagazzina acqua, e la sua tensione non può cambiare istantaneamente: deve essere caricato o scaricato attraverso una resistenza. Il tempo necessario è dell'ordine di R per C, la costante di tempo; dopo una costante di tempo la tensione ha percorso circa il 63% della sua escursione. Per un piedino di ingresso del kit, 45 kΩ per 2 pF danno 90 nanosecondi. Ogni filo e ogni ingresso di transistor si comporta come un piccolo condensatore, ed è questa l'origine fisica del ritardo delle porte. Un condensatore carico o scarico è anche un modo per memorizzare un bit, come mostra la cella DRAM della Lezione 15.
 DA COMPRENDERE OGGI: tensione, corrente, legge di Ohm.
 Per il docente: RC è la costante di tempo: dopo RC la tensione ha percorso circa il 63% della strada. Capacità di un piedino dell'ESP32-C6: 2 pF tipici (datasheet). Fili e pulsante ne aggiungono altra, quindi il valore reale è maggiore.</a:t>
             </a:r>
@@ -2099,7 +2099,7 @@
           <a:p>
             <a:r>
               <a:rPr lang="en-US" dirty="0"/>
-              <a:t>I conduttori lasciano scorrere la carica; gli isolanti no. I semiconduttori stanno in mezzo, e la loro conduzione si può controllare. Il controllo si ottiene con il drogaggio: l'aggiunta di pochi atomi di un altro elemento. Nel silicio di tipo n ci sono elettroni in più, portatori negativi; nel silicio di tipo p ci sono elettroni mancanti, le lacune, che si comportano da portatori positivi. Dove una regione p incontra una regione n c'è una giunzione. Un chip è una fetta di silicio con miliardi di regioni di questo tipo, collegate da strati di metallo.
+              <a:t>I conduttori permettono il flusso della carica; gli isolanti lo impediscono. I semiconduttori stanno tra i due, e la loro conducibilità si può controllare. Il controllo si ottiene con il drogaggio: l'introduzione di un piccolo numero di atomi di un altro elemento. Nel silicio di tipo n c'è un eccesso di elettroni, che fanno da portatori negativi; nel silicio di tipo p c'è un difetto di elettroni, detti lacune, che si comportano come portatori positivi. Dove una regione p incontra una regione n si forma una giunzione. Un chip è una fetta di silicio con miliardi di tali regioni, interconnesse da strati di metallo.
 DA COMPRENDERE OGGI: il transistor come interruttore.
 Per il docente: Il silicio è il secondo elemento più abbondante della crosta terrestre: sabbia. L'intera industria si regge sul purificarlo e drogarlo con estrema precisione.</a:t>
             </a:r>
@@ -2189,7 +2189,7 @@
           <a:p>
             <a:r>
               <a:rPr lang="en-US" dirty="0"/>
-              <a:t>La storia dell'interruttore senza parti mobili, in sei date. Il transistor del 1947 sostituisce la valvola termoionica. Il circuito integrato del 1958 mette più transistor su un solo pezzo di semiconduttore. Il transistor MOS del 1960 è piccolo, semplice da costruire e non richiede quasi corrente di controllo. Il CMOS, nel 1963, combina due tipi complementari così che si assorba potenza solo commutando. Nel 1971 un intero processore sta su un chip con 2300 transistor; oggi un chip ne contiene decine di miliardi.
+              <a:t>La storia dell'interruttore senza parti in movimento, in sei date. Il transistor del 1947 sostituisce la valvola termoionica. Il circuito integrato del 1958 colloca più transistor su un solo pezzo di semiconduttore. Il transistor MOS del 1960 è piccolo, semplice da fabbricare e non richiede quasi corrente di comando. Il CMOS, nel 1963, combina due tipi complementari così che la potenza si consumi sostanzialmente solo durante la commutazione. Nel 1971 un processore completo sta su un chip con 2.300 transistor; un chip contemporaneo ne contiene decine di miliardi.
 DA COMPRENDERE OGGI: il transistor come interruttore.
 Per il docente: Un transistor è un dispositivo a tre terminali in cui un piccolo segnale su uno controlla la corrente tra gli altri due. Usato come amplificatore ha reso portatile la radio; usato come interruttore ha reso possibile il calcolatore. Valvole e relè facevano lo stesso lavoro nei primi calcolatori della Lezione 03, un milione di volte più grandi e più lenti.</a:t>
             </a:r>
@@ -2279,7 +2279,7 @@
           <a:p>
             <a:r>
               <a:rPr lang="en-US" dirty="0"/>
-              <a:t>Un transistor MOS ha tre terminali: il gate controlla se la corrente può passare tra gli altri due, source e drain. I tipi sono due, e la tabella dice tutto: un nMOS conduce quando il suo gate è alto; un pMOS conduce quando il suo gate è basso. Sono complementari: ciò che chiude l'uno apre l'altro. Il gate è isolato, quindi non assorbe praticamente corrente. Un altro fatto servirà tra poco: un nMOS collega bene a massa, un pMOS collega bene all'alimentazione.
+              <a:t>Un transistor MOS ha tre terminali: il gate controlla se la corrente può passare tra gli altri due, il source e il drain. Esistono due tipi, e la tabella contiene tutto ciò che serve: un nMOS conduce quando il suo gate è alto, un pMOS quando il suo gate è basso. Sono complementari, perché la tensione che chiude l'uno apre l'altro. Il gate è isolato e non assorbe praticamente corrente. Servirà tra poco un fatto ulteriore: un nMOS è efficace nel collegare un nodo alla massa, un pMOS nel collegarlo all'alimentazione.
 DA COMPRENDERE OGGI: il transistor come interruttore.
 Per il docente: MOS: metallo, ossido, semiconduttore, i tre strati del gate. Il cerchietto sul gate del pMOS significa, come nei simboli logici, «attivo quando è basso». Corrente di ingresso di un piedino dell'ESP32-C6: al più 50 nA (datasheet).</a:t>
             </a:r>
@@ -3359,7 +3359,7 @@
                 <a:ea typeface="Calibri" pitchFamily="34" charset="-122"/>
                 <a:cs typeface="Calibri" pitchFamily="34" charset="-120"/>
               </a:rPr>
-              <a:t>10-Architettura_dei_Calcolatori-Elettronica-Codice.pptx</a:t>
+              <a:t>10-Architettura_dei_Calcolatori-Elettronica-Lab.pptx</a:t>
             </a:r>
             <a:endParaRPr lang="en-US" sz="1300" dirty="0"/>
           </a:p>

--- a/it/slides/10-Architettura_dei_Calcolatori-Elettronica.pptx
+++ b/it/slides/10-Architettura_dei_Calcolatori-Elettronica.pptx
@@ -126,13 +126,13 @@
   <p:extLst>
     <p:ext uri="{521415D9-36F7-43E2-AB2F-B90AF26B5E84}">
       <p14:sectionLst xmlns:p14="http://schemas.microsoft.com/office/powerpoint/2010/main">
-        <p14:section name="Apertura" id="{c7bfb96e-17d2-1519-54f8-1028c4b1afb7}">
+        <p14:section name="Apertura" id="{bbdc3ae8-d2b7-c6e5-5127-ab8128537d6a}">
           <p14:sldIdLst>
             <p14:sldId id="256"/>
             <p14:sldId id="257"/>
           </p14:sldIdLst>
         </p14:section>
-        <p14:section name="L'elettricità in quattro grandezze" id="{fa75bde0-b428-8072-7c21-870e7f32902b}">
+        <p14:section name="L'elettricità in quattro grandezze" id="{3eecf414-6d55-21c2-77ba-9af337d4ce57}">
           <p14:sldIdLst>
             <p14:sldId id="258"/>
             <p14:sldId id="259"/>
@@ -140,14 +140,14 @@
             <p14:sldId id="261"/>
           </p14:sldIdLst>
         </p14:section>
-        <p14:section name="Semiconduttori" id="{94e1a22f-f956-3682-bbad-e1c0da9822d7}">
+        <p14:section name="Semiconduttori" id="{72166c95-7f38-a615-7da2-5fec034a89ad}">
           <p14:sldIdLst>
             <p14:sldId id="262"/>
             <p14:sldId id="263"/>
             <p14:sldId id="264"/>
           </p14:sldIdLst>
         </p14:section>
-        <p14:section name="Dai volt ai bit" id="{216ef01e-e2d5-415b-2709-6d9ee3f7305c}">
+        <p14:section name="Dai volt ai bit" id="{6a5502f8-d608-73b1-6b27-f7945cf1c3a5}">
           <p14:sldIdLst>
             <p14:sldId id="265"/>
             <p14:sldId id="266"/>
@@ -157,7 +157,7 @@
             <p14:sldId id="270"/>
           </p14:sldIdLst>
         </p14:section>
-        <p14:section name="Ritorno alla macchina" id="{ebdabd81-f120-e01d-592c-74edfac346c9}">
+        <p14:section name="Ritorno alla macchina" id="{7f53b6d5-1e7a-b5b4-02f1-8915c022dc30}">
           <p14:sldIdLst>
             <p14:sldId id="271"/>
             <p14:sldId id="272"/>
@@ -1021,7 +1021,7 @@
           <a:p>
             <a:r>
               <a:rPr lang="en-US" dirty="0"/>
-              <a:t>Il costo dei circuiti misurato in transistor. Un NOT costa 2, un NAND o un NOR 4, un AND o un OR 6, perché ciascuno è un NAND o un NOR seguito da un invertitore. Questo rovescia l'intuizione suggerita dall'algebra: in CMOS le porte invertenti sono quelle primitive, e un AND costa più di un NAND. Un sommatore completo richiede circa 28 transistor, una cella di memoria 6, un flip-flop circa 20. Lo scopo della minimizzazione diventa ora concreto: meno letterali significano meno transistor, e quindi meno area, meno energia e meno ritardo.
+              <a:t>Il costo dei circuiti misurato in transistor. Un NOT costa 2, un NAND o un NOR 4, un AND o un OR 6, perché ciascuno è un NAND o un NOR seguito da un invertitore. Questo rovescia l'intuizione suggerita dall'algebra: in CMOS le porte invertenti sono quelle primitive, e un AND costa più di un NAND. Un sommatore completo richiede circa 28 transistor, una cella di memoria 6, un flip-flop, l'elemento di memoria da un bit della Lezione 13, circa 20. Lo scopo della minimizzazione diventa ora concreto: meno letterali significano meno transistor, e quindi meno area, meno energia e meno ritardo.
 DA COMPRENDERE OGGI: le porte CMOS.
 Per il docente: Ecco perché NAND è la porta universale della Lezione 09 in pratica oltre che in teoria: un AND costa più di un NAND. I conteggi valgono per il CMOS statico convenzionale e variano con lo stile di progetto. Trentadue sommatori completi: circa 900 transistor per l'addizionatore che sta dietro l'istruzione add.</a:t>
             </a:r>

--- a/it/slides/10-Architettura_dei_Calcolatori-Elettronica.pptx
+++ b/it/slides/10-Architettura_dei_Calcolatori-Elettronica.pptx
@@ -126,13 +126,13 @@
   <p:extLst>
     <p:ext uri="{521415D9-36F7-43E2-AB2F-B90AF26B5E84}">
       <p14:sectionLst xmlns:p14="http://schemas.microsoft.com/office/powerpoint/2010/main">
-        <p14:section name="Apertura" id="{bbdc3ae8-d2b7-c6e5-5127-ab8128537d6a}">
+        <p14:section name="Apertura" id="{8041d6f0-d53c-8d00-3e63-2c0f071f480c}">
           <p14:sldIdLst>
             <p14:sldId id="256"/>
             <p14:sldId id="257"/>
           </p14:sldIdLst>
         </p14:section>
-        <p14:section name="L'elettricità in quattro grandezze" id="{3eecf414-6d55-21c2-77ba-9af337d4ce57}">
+        <p14:section name="L'elettricità in quattro grandezze" id="{024e9793-3bb0-d16c-a287-f787fb4e9f21}">
           <p14:sldIdLst>
             <p14:sldId id="258"/>
             <p14:sldId id="259"/>
@@ -140,14 +140,14 @@
             <p14:sldId id="261"/>
           </p14:sldIdLst>
         </p14:section>
-        <p14:section name="Semiconduttori" id="{72166c95-7f38-a615-7da2-5fec034a89ad}">
+        <p14:section name="Semiconduttori" id="{7081e45e-4385-ec22-2315-53dea4b97fe0}">
           <p14:sldIdLst>
             <p14:sldId id="262"/>
             <p14:sldId id="263"/>
             <p14:sldId id="264"/>
           </p14:sldIdLst>
         </p14:section>
-        <p14:section name="Dai volt ai bit" id="{6a5502f8-d608-73b1-6b27-f7945cf1c3a5}">
+        <p14:section name="Dai volt ai bit" id="{6408b04c-22de-acb0-9cee-de08c0778ce0}">
           <p14:sldIdLst>
             <p14:sldId id="265"/>
             <p14:sldId id="266"/>
@@ -157,7 +157,7 @@
             <p14:sldId id="270"/>
           </p14:sldIdLst>
         </p14:section>
-        <p14:section name="Ritorno alla macchina" id="{7f53b6d5-1e7a-b5b4-02f1-8915c022dc30}">
+        <p14:section name="Ritorno alla macchina" id="{4535d49d-42a2-2c74-b8b6-4c01a4dc9d30}">
           <p14:sldIdLst>
             <p14:sldId id="271"/>
             <p14:sldId id="272"/>
@@ -573,6 +573,8 @@
               <a:t>Finora una porta è stata un simbolo e una tavola di verità; questa lezione le dà un corpo fisico. Segue un solo bit, quello di un pulsante del kit, dal dito che lo preme al registro che il programma legge, spiegando lungo il percorso che cos'è un volt, che cosa fa un transistor e come due transistor formano una porta NOT. Non si presuppone alcuna conoscenza di fisica. La citazione di Arthur C. Clarke nomina l'impressione che la lezione si propone di dissipare: un chip sembra magia solo finché non si vede di che cosa è fatto.
 Stato di apprendimento: DA COMPRENDERE OGGI, alla fine di questa lezione lo spiegate, lo seguite passo passo e lo applicate da soli; DA UTILIZZARE OGGI, oggi seguite e usate la ricetta; come funziona dentro si spiega più avanti, o non fa parte del corso; DA COMPRENDERE PIÙ AVANTI, riconoscete il nome e lo scopo; lo spiega una lezione successiva. Una slide senza etichetta è contesto: una storia, un esempio, una domanda, un esercizio.
 Stato di apprendimento di questa lezione. DA COMPRENDERE OGGI: gli ingressi con pull-up; tensione, corrente, legge di Ohm; il transistor come interruttore; dai volt ai bit; le porte CMOS. DA UTILIZZARE OGGI: il programma completo, gli strumenti di PRG32 (si usa, non si studia, in questo corso). DA COMPRENDERE PIÙ AVANTI: il clock (Lezione 13). Una slide senza etichetta è contesto: una storia, un esempio, una domanda, un esercizio.
+Percorso. I risultati di oggi: (1) spiegare come un transistor MOS funziona da interruttore e come CMOS costruisce una porta; (2) leggere livelli logici e margini di rumore dalle tensioni; (3) dimensionare la resistenza di un LED e spiegare il pull-up di un pulsante. Si appoggia su: solo ciò che ha preparato la Lezione 01. Prossimo passo: Lezione 11, Macchine combinatorie.
+Ponte. Nella Lezione 02 il contatore sopravviveva da un frame all'altro in memoria, non in un registro. Oggi una cella di memoria costa circa 6 transistor e un flip-flop circa 20: ricordare un bit è un circuito. La Lezione 13 mostra come latch e flip-flop conservano un bit. Richiamo: Dove abitava il contatore della Lezione 02 tra due frame, e perché non in t1?
 Per il docente: Lezione nuova del 2026/27, collocata tra l'algebra di Boole e le macchine combinatorie. Dà un corpo fisico alle porte delle Lezioni 08 e 09 prima che la Lezione 11 le componga in macchine. Spirale: il pulsante del kit, letto fin dai primi laboratori, viene seguito dal dito al bit. Non si presuppongono conoscenze di fisica; i numeri del kit vengono dal datasheet dell'ESP32-C6 (tabella 5-4) e dalla documentazione hardware di PRG32.</a:t>
             </a:r>
             <a:endParaRPr lang="en-US" dirty="0"/>
@@ -1650,7 +1652,7 @@
             <a:r>
               <a:rPr lang="en-US" dirty="0"/>
               <a:t>Cinque conclusioni. La tensione spinge, la corrente scorre, la resistenza si oppone, e la legge di Ohm copre gran parte di ciò che serve a un progettista digitale. Un transistor MOS è un interruttore comandato in tensione, disponibile in due tipi complementari. Un bit è un intervallo di tensioni, reso affidabile dai margini di rumore e dalla rigenerazione dei livelli a ogni porta. Le porte CMOS sono coppie di reti di interruttori complementari, e le porte invertenti sono le più economiche. La commutazione costa tempo ed energia. La prossima lezione costruisce con queste porte delle macchine funzionali.
-Stato di apprendimento, riepilogo. DA COMPRENDERE OGGI: gli ingressi con pull-up; tensione, corrente, legge di Ohm; il transistor come interruttore; dai volt ai bit; le porte CMOS. DA UTILIZZARE OGGI: il programma completo, gli strumenti di PRG32 (si usa, non si studia, in questo corso). DA COMPRENDERE PIÙ AVANTI: il clock (Lezione 13). Una slide senza etichetta è contesto: una storia, un esempio, una domanda, un esercizio.
+Stato di apprendimento, riepilogo. DA COMPRENDERE OGGI: gli ingressi con pull-up; tensione, corrente, legge di Ohm; il transistor come interruttore; dai volt ai bit; le porte CMOS. DA UTILIZZARE OGGI: il programma completo, gli strumenti di PRG32 (si usa, non si studia, in questo corso). DA COMPRENDERE PIÙ AVANTI: il clock (Lezione 13). Una slide senza etichetta è contesto: una storia, un esempio, una domanda, un esercizio. Il filo della lezione: Un bit è una tensione dentro un intervallo garantito, e una porta è qualche interruttore: il pulsante del kit è ora un circuito che capite. Prossimo passo: le macchine costruite con le porte. Biglietto d'uscita (da due a quattro minuti, da soli, su carta): 1. In due frasi: come funziona da interruttore un transistor MOS, e perché un invertitore CMOS non assorbe quasi corrente quando il suo ingresso è stabile? 2. Sul kit un ingresso legge 1 sopra 2,475 V e 0 sotto 0,825 V; un'uscita dà un 1 sopra 2,64 V. Un filo aggiunge 0,1 V di rumore verso il basso. Un 1 può essere letto male? Che cosa legge un ingresso a 1,6 V?
 Per il docente: Prossima lezione: le macchine combinatorie, costruite con queste porte.</a:t>
             </a:r>
             <a:endParaRPr lang="en-US" dirty="0"/>
